--- a/paper/controller_advisor_slides.pptx
+++ b/paper/controller_advisor_slides.pptx
@@ -3104,7 +3104,7 @@
         </p:nvSpPr>
         <p:spPr>
           <a:xfrm>
-            <a:off x="914400" y="2377440"/>
+            <a:off x="914400" y="2286000"/>
             <a:ext cx="10332720" cy="1097280"/>
           </a:xfrm>
           <a:prstGeom prst="rect">
@@ -3137,7 +3137,7 @@
         </p:nvSpPr>
         <p:spPr>
           <a:xfrm>
-            <a:off x="914400" y="3383280"/>
+            <a:off x="914400" y="3291840"/>
             <a:ext cx="10332720" cy="731520"/>
           </a:xfrm>
           <a:prstGeom prst="rect">
@@ -3157,7 +3157,7 @@
                   <a:srgbClr val="555555"/>
                 </a:solidFill>
               </a:rPr>
-              <a:t>Advisor briefing — status: open methodological question, not a locked result</a:t>
+              <a:t>Advisor briefing — fully randomized robustness protocol, all three checks agree</a:t>
             </a:r>
           </a:p>
         </p:txBody>
@@ -3236,7 +3236,7 @@
           <a:lstStyle/>
           <a:p>
             <a:r>
-              <a:rPr sz="3000" b="1">
+              <a:rPr sz="2800" b="1">
                 <a:solidFill>
                   <a:srgbClr val="1F2A44"/>
                 </a:solidFill>
@@ -3274,7 +3274,7 @@
               </a:spcAft>
             </a:pPr>
             <a:r>
-              <a:rPr sz="1600" b="1">
+              <a:rPr sz="1500" b="1">
                 <a:solidFill>
                   <a:srgbClr val="1F2A44"/>
                 </a:solidFill>
@@ -3289,7 +3289,7 @@
               </a:spcAft>
             </a:pPr>
             <a:r>
-              <a:rPr sz="1450" b="0">
+              <a:rPr sz="1350" b="0">
                 <a:solidFill>
                   <a:srgbClr val="555555"/>
                 </a:solidFill>
@@ -3304,7 +3304,7 @@
               </a:spcAft>
             </a:pPr>
             <a:r>
-              <a:rPr sz="1450" b="0">
+              <a:rPr sz="1350" b="0">
                 <a:solidFill>
                   <a:srgbClr val="555555"/>
                 </a:solidFill>
@@ -3319,7 +3319,7 @@
               </a:spcAft>
             </a:pPr>
             <a:r>
-              <a:rPr sz="1600" b="1">
+              <a:rPr sz="1500" b="1">
                 <a:solidFill>
                   <a:srgbClr val="1F2A44"/>
                 </a:solidFill>
@@ -3334,12 +3334,12 @@
               </a:spcAft>
             </a:pPr>
             <a:r>
-              <a:rPr sz="1450" b="0">
+              <a:rPr sz="1350" b="0">
                 <a:solidFill>
                   <a:srgbClr val="555555"/>
                 </a:solidFill>
               </a:rPr>
-              <a:t>– Takes the recognizer exactly as trained — no new ML, no retraining</a:t>
+              <a:t>– Takes the recognizer exactly as trained — no new training, no synthetic error model</a:t>
             </a:r>
           </a:p>
           <a:p>
@@ -3349,7 +3349,7 @@
               </a:spcAft>
             </a:pPr>
             <a:r>
-              <a:rPr sz="1450" b="0">
+              <a:rPr sz="1350" b="0">
                 <a:solidFill>
                   <a:srgbClr val="555555"/>
                 </a:solidFill>
@@ -3364,7 +3364,7 @@
               </a:spcAft>
             </a:pPr>
             <a:r>
-              <a:rPr sz="1450" b="0">
+              <a:rPr sz="1350" b="0">
                 <a:solidFill>
                   <a:srgbClr val="555555"/>
                 </a:solidFill>
@@ -3379,7 +3379,7 @@
               </a:spcAft>
             </a:pPr>
             <a:r>
-              <a:rPr sz="1450" b="0">
+              <a:rPr sz="1350" b="0">
                 <a:solidFill>
                   <a:srgbClr val="555555"/>
                 </a:solidFill>
@@ -3394,7 +3394,7 @@
               </a:spcAft>
             </a:pPr>
             <a:r>
-              <a:rPr sz="1450" b="0">
+              <a:rPr sz="1350" b="0">
                 <a:solidFill>
                   <a:srgbClr val="555555"/>
                 </a:solidFill>
@@ -3409,7 +3409,7 @@
               </a:spcAft>
             </a:pPr>
             <a:r>
-              <a:rPr sz="1600" b="1">
+              <a:rPr sz="1500" b="1">
                 <a:solidFill>
                   <a:srgbClr val="1F2A44"/>
                 </a:solidFill>
@@ -3424,7 +3424,7 @@
               </a:spcAft>
             </a:pPr>
             <a:r>
-              <a:rPr sz="1450" b="0">
+              <a:rPr sz="1350" b="0">
                 <a:solidFill>
                   <a:srgbClr val="555555"/>
                 </a:solidFill>
@@ -3439,7 +3439,7 @@
               </a:spcAft>
             </a:pPr>
             <a:r>
-              <a:rPr sz="1450" b="0">
+              <a:rPr sz="1350" b="0">
                 <a:solidFill>
                   <a:srgbClr val="555555"/>
                 </a:solidFill>
@@ -3578,7 +3578,7 @@
           <a:lstStyle/>
           <a:p>
             <a:r>
-              <a:rPr sz="3000" b="1">
+              <a:rPr sz="2800" b="1">
                 <a:solidFill>
                   <a:srgbClr val="1F2A44"/>
                 </a:solidFill>
@@ -3597,7 +3597,7 @@
         <p:spPr>
           <a:xfrm>
             <a:off x="457200" y="1371600"/>
-            <a:ext cx="6675120" cy="5029200"/>
+            <a:ext cx="10332720" cy="5029200"/>
           </a:xfrm>
           <a:prstGeom prst="rect">
             <a:avLst/>
@@ -3616,7 +3616,7 @@
               </a:spcAft>
             </a:pPr>
             <a:r>
-              <a:rPr sz="1500" b="0">
+              <a:rPr sz="1700" b="0">
                 <a:solidFill>
                   <a:srgbClr val="1F2A44"/>
                 </a:solidFill>
@@ -3631,7 +3631,7 @@
               </a:spcAft>
             </a:pPr>
             <a:r>
-              <a:rPr sz="1500" b="0">
+              <a:rPr sz="1700" b="0">
                 <a:solidFill>
                   <a:srgbClr val="1F2A44"/>
                 </a:solidFill>
@@ -3646,7 +3646,7 @@
               </a:spcAft>
             </a:pPr>
             <a:r>
-              <a:rPr sz="1500" b="1">
+              <a:rPr sz="1700" b="1">
                 <a:solidFill>
                   <a:srgbClr val="1F2A44"/>
                 </a:solidFill>
@@ -3661,12 +3661,57 @@
               </a:spcAft>
             </a:pPr>
             <a:r>
-              <a:rPr sz="1500" b="0">
+              <a:rPr sz="1700" b="1">
                 <a:solidFill>
                   <a:srgbClr val="1F2A44"/>
                 </a:solidFill>
               </a:rPr>
-              <a:t>• The 7 gestures are picked purely by how reliably the recognizer classifies them (recall rank) — not by which gesture looks like a plausible command</a:t>
+              <a:t>• The 7 gestures relabeled for the task are a completely RANDOM draw from the 22 recorded gestures</a:t>
+            </a:r>
+          </a:p>
+          <a:p>
+            <a:pPr lvl="1">
+              <a:spcAft>
+                <a:spcPts val="800"/>
+              </a:spcAft>
+            </a:pPr>
+            <a:r>
+              <a:rPr sz="1550" b="0">
+                <a:solidFill>
+                  <a:srgbClr val="555555"/>
+                </a:solidFill>
+              </a:rPr>
+              <a:t>– Not chosen by which gesture the recognizer classifies best</a:t>
+            </a:r>
+          </a:p>
+          <a:p>
+            <a:pPr lvl="1">
+              <a:spcAft>
+                <a:spcPts val="800"/>
+              </a:spcAft>
+            </a:pPr>
+            <a:r>
+              <a:rPr sz="1550" b="0">
+                <a:solidFill>
+                  <a:srgbClr val="555555"/>
+                </a:solidFill>
+              </a:rPr>
+              <a:t>– Not chosen by which gesture looks like a plausible command</a:t>
+            </a:r>
+          </a:p>
+          <a:p>
+            <a:pPr lvl="1">
+              <a:spcAft>
+                <a:spcPts val="800"/>
+              </a:spcAft>
+            </a:pPr>
+            <a:r>
+              <a:rPr sz="1550" b="0">
+                <a:solidFill>
+                  <a:srgbClr val="555555"/>
+                </a:solidFill>
+              </a:rPr>
+              <a:t>– Not chosen by any property of the data at all</a:t>
             </a:r>
           </a:p>
           <a:p>
@@ -3676,12 +3721,12 @@
               </a:spcAft>
             </a:pPr>
             <a:r>
-              <a:rPr sz="1500" b="1">
+              <a:rPr sz="1700" b="1">
                 <a:solidFill>
                   <a:srgbClr val="1F2A44"/>
                 </a:solidFill>
               </a:rPr>
-              <a:t>• Proof this is not secretly semantic:</a:t>
+              <a:t>• The 12-step sequence deliberately visits the 2 safety-critical states 3 times</a:t>
             </a:r>
           </a:p>
           <a:p>
@@ -3691,52 +3736,7 @@
               </a:spcAft>
             </a:pPr>
             <a:r>
-              <a:rPr sz="1350" b="0">
-                <a:solidFill>
-                  <a:srgbClr val="555555"/>
-                </a:solidFill>
-              </a:rPr>
-              <a:t>– The one recorded gesture named “pickup” — the single gesture whose name suggests a grasping action — is specifically NOT one of the two safety-critical picks</a:t>
-            </a:r>
-          </a:p>
-          <a:p>
-            <a:pPr lvl="1">
-              <a:spcAft>
-                <a:spcPts val="800"/>
-              </a:spcAft>
-            </a:pPr>
-            <a:r>
-              <a:rPr sz="1350" b="0">
-                <a:solidFill>
-                  <a:srgbClr val="555555"/>
-                </a:solidFill>
-              </a:rPr>
-              <a:t>– It ranks 7th by recall and lands on a routine slot instead</a:t>
-            </a:r>
-          </a:p>
-          <a:p>
-            <a:pPr>
-              <a:spcAft>
-                <a:spcPts val="800"/>
-              </a:spcAft>
-            </a:pPr>
-            <a:r>
-              <a:rPr sz="1500" b="1">
-                <a:solidFill>
-                  <a:srgbClr val="1F2A44"/>
-                </a:solidFill>
-              </a:rPr>
-              <a:t>• The 12-step sequence deliberately visits the 2 safety-critical states 3 times</a:t>
-            </a:r>
-          </a:p>
-          <a:p>
-            <a:pPr lvl="1">
-              <a:spcAft>
-                <a:spcPts val="800"/>
-              </a:spcAft>
-            </a:pPr>
-            <a:r>
-              <a:rPr sz="1350" b="0">
+              <a:rPr sz="1550" b="0">
                 <a:solidFill>
                   <a:srgbClr val="555555"/>
                 </a:solidFill>
@@ -3754,8 +3754,8 @@
         </p:nvSpPr>
         <p:spPr>
           <a:xfrm>
-            <a:off x="7406640" y="1463040"/>
-            <a:ext cx="4206240" cy="2103120"/>
+            <a:off x="457200" y="4663440"/>
+            <a:ext cx="11247120" cy="1737360"/>
           </a:xfrm>
           <a:prstGeom prst="rect">
             <a:avLst/>
@@ -3795,71 +3795,14 @@
                 </a:solidFill>
               </a:rPr>
               <a:t>[FIGURE]
-7-gesture -&gt; System-Input
-mapping table with recall values
-(trained_models/Phase3-controller/mapping.csv)</a:t>
-            </a:r>
-          </a:p>
-        </p:txBody>
-      </p:sp>
-      <p:sp>
-        <p:nvSpPr>
-          <p:cNvPr id="5" name="Rectangle 4"/>
-          <p:cNvSpPr/>
-          <p:nvPr/>
-        </p:nvSpPr>
-        <p:spPr>
-          <a:xfrm>
-            <a:off x="7406640" y="3749039"/>
-            <a:ext cx="4206240" cy="2103120"/>
-          </a:xfrm>
-          <a:prstGeom prst="rect">
-            <a:avLst/>
-          </a:prstGeom>
-          <a:solidFill>
-            <a:srgbClr val="EEEEEE"/>
-          </a:solidFill>
-          <a:ln w="15875">
-            <a:solidFill>
-              <a:srgbClr val="555555"/>
-            </a:solidFill>
-          </a:ln>
-        </p:spPr>
-        <p:style>
-          <a:lnRef idx="1">
-            <a:schemeClr val="accent1"/>
-          </a:lnRef>
-          <a:fillRef idx="3">
-            <a:schemeClr val="accent1"/>
-          </a:fillRef>
-          <a:effectRef idx="2">
-            <a:schemeClr val="accent1"/>
-          </a:effectRef>
-          <a:fontRef idx="minor">
-            <a:schemeClr val="lt1"/>
-          </a:fontRef>
-        </p:style>
-        <p:txBody>
-          <a:bodyPr rtlCol="0" anchor="ctr" wrap="square"/>
-          <a:lstStyle/>
-          <a:p>
-            <a:pPr algn="ctr"/>
-            <a:r>
-              <a:rPr sz="1200" i="1">
-                <a:solidFill>
-                  <a:srgbClr val="555555"/>
-                </a:solidFill>
-              </a:rPr>
-              <a:t>[FIGURE]
-12-step sequence flow diagram,
-3 safety-critical visits highlighted</a:t>
-            </a:r>
-          </a:p>
-        </p:txBody>
-      </p:sp>
-      <p:sp>
-        <p:nvSpPr>
-          <p:cNvPr id="6" name="TextBox 5"/>
+12-step sequence flow diagram, 3 safety-critical visits highlighted</a:t>
+            </a:r>
+          </a:p>
+        </p:txBody>
+      </p:sp>
+      <p:sp>
+        <p:nvSpPr>
+          <p:cNvPr id="5" name="TextBox 4"/>
           <p:cNvSpPr txBox="1"/>
           <p:nvPr/>
         </p:nvSpPr>
@@ -3931,12 +3874,12 @@
           <a:lstStyle/>
           <a:p>
             <a:r>
-              <a:rPr sz="3000" b="1">
+              <a:rPr sz="2800" b="1">
                 <a:solidFill>
                   <a:srgbClr val="1F2A44"/>
                 </a:solidFill>
               </a:rPr>
-              <a:t>Robustness Design — Why This Isn’t “Pick a Config That Wins”</a:t>
+              <a:t>The Full Methodology: Everything Is Randomized, Nothing Is Picked</a:t>
             </a:r>
           </a:p>
         </p:txBody>
@@ -3949,8 +3892,8 @@
         </p:nvSpPr>
         <p:spPr>
           <a:xfrm>
-            <a:off x="457200" y="960120"/>
-            <a:ext cx="11247120" cy="365760"/>
+            <a:off x="457200" y="914400"/>
+            <a:ext cx="11247120" cy="411480"/>
           </a:xfrm>
           <a:prstGeom prst="rect">
             <a:avLst/>
@@ -3964,12 +3907,257 @@
           <a:lstStyle/>
           <a:p>
             <a:r>
-              <a:rPr sz="1400" i="1">
+              <a:rPr sz="1300" i="1">
                 <a:solidFill>
                   <a:srgbClr val="555555"/>
                 </a:solidFill>
               </a:rPr>
-              <a:t>Three knobs a reviewer could accuse of being tuned for a favorable result. Three checks, one per knob:</a:t>
+              <a:t>This is the direct answer to “is this controlled or cherry-picked”</a:t>
+            </a:r>
+          </a:p>
+        </p:txBody>
+      </p:sp>
+      <p:sp>
+        <p:nvSpPr>
+          <p:cNvPr id="4" name="TextBox 3"/>
+          <p:cNvSpPr txBox="1"/>
+          <p:nvPr/>
+        </p:nvSpPr>
+        <p:spPr>
+          <a:xfrm>
+            <a:off x="457200" y="1417320"/>
+            <a:ext cx="10332720" cy="5029200"/>
+          </a:xfrm>
+          <a:prstGeom prst="rect">
+            <a:avLst/>
+          </a:prstGeom>
+          <a:noFill/>
+        </p:spPr>
+        <p:txBody>
+          <a:bodyPr wrap="square">
+            <a:spAutoFit/>
+          </a:bodyPr>
+          <a:lstStyle/>
+          <a:p>
+            <a:pPr>
+              <a:spcAft>
+                <a:spcPts val="800"/>
+              </a:spcAft>
+            </a:pPr>
+            <a:r>
+              <a:rPr sz="1700" b="1">
+                <a:solidFill>
+                  <a:srgbClr val="1F2A44"/>
+                </a:solidFill>
+              </a:rPr>
+              <a:t>• 120 independently, uniformly-random draws of which 7 gestures become the task’s inputs</a:t>
+            </a:r>
+          </a:p>
+          <a:p>
+            <a:pPr lvl="1">
+              <a:spcAft>
+                <a:spcPts val="800"/>
+              </a:spcAft>
+            </a:pPr>
+            <a:r>
+              <a:rPr sz="1550" b="0">
+                <a:solidFill>
+                  <a:srgbClr val="555555"/>
+                </a:solidFill>
+              </a:rPr>
+              <a:t>– No draw is chosen by recognizer accuracy, gesture semantics, or any other property — every draw is a fresh unweighted random sample</a:t>
+            </a:r>
+          </a:p>
+          <a:p>
+            <a:pPr>
+              <a:spcAft>
+                <a:spcPts val="800"/>
+              </a:spcAft>
+            </a:pPr>
+            <a:r>
+              <a:rPr sz="1700" b="1">
+                <a:solidFill>
+                  <a:srgbClr val="1F2A44"/>
+                </a:solidFill>
+              </a:rPr>
+              <a:t>• 1000 Monte Carlo task-execution trials per (assignment, method, shot-count, threshold) cell</a:t>
+            </a:r>
+          </a:p>
+          <a:p>
+            <a:pPr lvl="1">
+              <a:spcAft>
+                <a:spcPts val="800"/>
+              </a:spcAft>
+            </a:pPr>
+            <a:r>
+              <a:rPr sz="1550" b="0">
+                <a:solidFill>
+                  <a:srgbClr val="555555"/>
+                </a:solidFill>
+              </a:rPr>
+              <a:t>– Each trial replays the 12-step task against freshly resampled real recognizer output</a:t>
+            </a:r>
+          </a:p>
+          <a:p>
+            <a:pPr>
+              <a:spcAft>
+                <a:spcPts val="800"/>
+              </a:spcAft>
+            </a:pPr>
+            <a:r>
+              <a:rPr sz="1700" b="1">
+                <a:solidFill>
+                  <a:srgbClr val="1F2A44"/>
+                </a:solidFill>
+              </a:rPr>
+              <a:t>• All three robustness checks below share this exact same set of 120 random assignments</a:t>
+            </a:r>
+          </a:p>
+          <a:p>
+            <a:pPr lvl="1">
+              <a:spcAft>
+                <a:spcPts val="800"/>
+              </a:spcAft>
+            </a:pPr>
+            <a:r>
+              <a:rPr sz="1550" b="0">
+                <a:solidFill>
+                  <a:srgbClr val="555555"/>
+                </a:solidFill>
+              </a:rPr>
+              <a:t>– No separate “illustrative” or “representative” configuration anywhere in the results</a:t>
+            </a:r>
+          </a:p>
+          <a:p>
+            <a:pPr lvl="1">
+              <a:spcAft>
+                <a:spcPts val="800"/>
+              </a:spcAft>
+            </a:pPr>
+            <a:r>
+              <a:rPr sz="1550" b="0">
+                <a:solidFill>
+                  <a:srgbClr val="555555"/>
+                </a:solidFill>
+              </a:rPr>
+              <a:t>– An earlier version picked one fixed gesture assignment (ranked by recognizer reliability) for two of the three checks — fully replaced with the random design above, specifically to remove any appearance of a hand-picked task design</a:t>
+            </a:r>
+          </a:p>
+        </p:txBody>
+      </p:sp>
+      <p:sp>
+        <p:nvSpPr>
+          <p:cNvPr id="5" name="TextBox 4"/>
+          <p:cNvSpPr txBox="1"/>
+          <p:nvPr/>
+        </p:nvSpPr>
+        <p:spPr>
+          <a:xfrm>
+            <a:off x="457200" y="6446520"/>
+            <a:ext cx="11247120" cy="320040"/>
+          </a:xfrm>
+          <a:prstGeom prst="rect">
+            <a:avLst/>
+          </a:prstGeom>
+          <a:noFill/>
+        </p:spPr>
+        <p:txBody>
+          <a:bodyPr wrap="none">
+            <a:spAutoFit/>
+          </a:bodyPr>
+          <a:lstStyle/>
+          <a:p>
+            <a:r>
+              <a:rPr sz="900">
+                <a:solidFill>
+                  <a:srgbClr val="555555"/>
+                </a:solidFill>
+              </a:rPr>
+              <a:t>scripts/controller/controller_robust.py --vocabs 120 --missions 1000</a:t>
+            </a:r>
+          </a:p>
+        </p:txBody>
+      </p:sp>
+    </p:spTree>
+  </p:cSld>
+  <p:clrMapOvr>
+    <a:masterClrMapping/>
+  </p:clrMapOvr>
+</p:sld>
+</file>
+
+<file path=ppt/slides/slide5.xml><?xml version="1.0" encoding="utf-8"?>
+<p:sld xmlns:a="http://schemas.openxmlformats.org/drawingml/2006/main" xmlns:p="http://schemas.openxmlformats.org/presentationml/2006/main" xmlns:r="http://schemas.openxmlformats.org/officeDocument/2006/relationships">
+  <p:cSld>
+    <p:spTree>
+      <p:nvGrpSpPr>
+        <p:cNvPr id="1" name=""/>
+        <p:cNvGrpSpPr/>
+        <p:nvPr/>
+      </p:nvGrpSpPr>
+      <p:grpSpPr/>
+      <p:sp>
+        <p:nvSpPr>
+          <p:cNvPr id="2" name="TextBox 1"/>
+          <p:cNvSpPr txBox="1"/>
+          <p:nvPr/>
+        </p:nvSpPr>
+        <p:spPr>
+          <a:xfrm>
+            <a:off x="457200" y="274320"/>
+            <a:ext cx="11247120" cy="822960"/>
+          </a:xfrm>
+          <a:prstGeom prst="rect">
+            <a:avLst/>
+          </a:prstGeom>
+          <a:noFill/>
+        </p:spPr>
+        <p:txBody>
+          <a:bodyPr wrap="square">
+            <a:spAutoFit/>
+          </a:bodyPr>
+          <a:lstStyle/>
+          <a:p>
+            <a:r>
+              <a:rPr sz="2800" b="1">
+                <a:solidFill>
+                  <a:srgbClr val="1F2A44"/>
+                </a:solidFill>
+              </a:rPr>
+              <a:t>Robustness Design — Three Checks, One Shared Random Design</a:t>
+            </a:r>
+          </a:p>
+        </p:txBody>
+      </p:sp>
+      <p:sp>
+        <p:nvSpPr>
+          <p:cNvPr id="3" name="TextBox 2"/>
+          <p:cNvSpPr txBox="1"/>
+          <p:nvPr/>
+        </p:nvSpPr>
+        <p:spPr>
+          <a:xfrm>
+            <a:off x="457200" y="960120"/>
+            <a:ext cx="11247120" cy="411480"/>
+          </a:xfrm>
+          <a:prstGeom prst="rect">
+            <a:avLst/>
+          </a:prstGeom>
+          <a:noFill/>
+        </p:spPr>
+        <p:txBody>
+          <a:bodyPr wrap="square">
+            <a:spAutoFit/>
+          </a:bodyPr>
+          <a:lstStyle/>
+          <a:p>
+            <a:r>
+              <a:rPr sz="1300" i="1">
+                <a:solidFill>
+                  <a:srgbClr val="555555"/>
+                </a:solidFill>
+              </a:rPr>
+              <a:t>Three knobs a reviewer could accuse of being tuned for a favorable result. Three checks, one per knob, ALL run over the same 120 random assignments:</a:t>
             </a:r>
           </a:p>
         </p:txBody>
@@ -4078,7 +4266,7 @@
                             <a:srgbClr val="1F2A44"/>
                           </a:solidFill>
                         </a:rPr>
-                        <a:t>1 — Randomized</a:t>
+                        <a:t>1 — Base</a:t>
                       </a:r>
                     </a:p>
                     <a:p>
@@ -4089,7 +4277,7 @@
                             <a:srgbClr val="1F2A44"/>
                           </a:solidFill>
                         </a:rPr>
-                        <a:t>assignment</a:t>
+                        <a:t>outcome</a:t>
                       </a:r>
                     </a:p>
                   </a:txBody>
@@ -4111,7 +4299,7 @@
                             <a:srgbClr val="1F2A44"/>
                           </a:solidFill>
                         </a:rPr>
-                        <a:t>Re-draw which 7 gestures are</a:t>
+                        <a:t>Task success/failure across</a:t>
                       </a:r>
                     </a:p>
                     <a:p>
@@ -4122,18 +4310,7 @@
                             <a:srgbClr val="1F2A44"/>
                           </a:solidFill>
                         </a:rPr>
-                        <a:t>task inputs, 120x at random;</a:t>
-                      </a:r>
-                    </a:p>
-                    <a:p>
-                      <a:pPr algn="ctr"/>
-                      <a:r>
-                        <a:rPr sz="1200">
-                          <a:solidFill>
-                            <a:srgbClr val="1F2A44"/>
-                          </a:solidFill>
-                        </a:rPr>
-                        <a:t>report the distribution</a:t>
+                        <a:t>the 120 random assignments</a:t>
                       </a:r>
                     </a:p>
                   </a:txBody>
@@ -4234,7 +4411,7 @@
                             <a:srgbClr val="1F2A44"/>
                           </a:solidFill>
                         </a:rPr>
-                        <a:t>safety-critical error is,</a:t>
+                        <a:t>safety-critical error is (6 settings),</a:t>
                       </a:r>
                     </a:p>
                     <a:p>
@@ -4245,7 +4422,7 @@
                             <a:srgbClr val="1F2A44"/>
                           </a:solidFill>
                         </a:rPr>
-                        <a:t>6 settings (mild to near-infinite)</a:t>
+                        <a:t>same 120 assignments</a:t>
                       </a:r>
                     </a:p>
                   </a:txBody>
@@ -4346,7 +4523,7 @@
                             <a:srgbClr val="1F2A44"/>
                           </a:solidFill>
                         </a:rPr>
-                        <a:t>automatically per method from a</a:t>
+                        <a:t>automatically from a fixed safety</a:t>
                       </a:r>
                     </a:p>
                     <a:p>
@@ -4357,7 +4534,7 @@
                             <a:srgbClr val="1F2A44"/>
                           </a:solidFill>
                         </a:rPr>
-                        <a:t>fixed false-activation budget</a:t>
+                        <a:t>budget, same 120 assignments</a:t>
                       </a:r>
                     </a:p>
                   </a:txBody>
@@ -4455,10 +4632,10 @@
               </a:rPr>
               <a:t>[FIGURE]
 Frontier plot: task-success vs.
-false-activation tradeoff curves,
-one line per method
+false-activation, one line per method,
+averaged over 120 assignments
 (trained_models/Phase3-controller/
-robust/frontier.csv)</a:t>
+robust/frontier.png)</a:t>
             </a:r>
           </a:p>
         </p:txBody>
@@ -4491,276 +4668,7 @@
                   <a:srgbClr val="555555"/>
                 </a:solidFill>
               </a:rPr>
-              <a:t>wiki/concepts/controller.md §9</a:t>
-            </a:r>
-          </a:p>
-        </p:txBody>
-      </p:sp>
-    </p:spTree>
-  </p:cSld>
-  <p:clrMapOvr>
-    <a:masterClrMapping/>
-  </p:clrMapOvr>
-</p:sld>
-</file>
-
-<file path=ppt/slides/slide5.xml><?xml version="1.0" encoding="utf-8"?>
-<p:sld xmlns:a="http://schemas.openxmlformats.org/drawingml/2006/main" xmlns:p="http://schemas.openxmlformats.org/presentationml/2006/main" xmlns:r="http://schemas.openxmlformats.org/officeDocument/2006/relationships">
-  <p:cSld>
-    <p:spTree>
-      <p:nvGrpSpPr>
-        <p:cNvPr id="1" name=""/>
-        <p:cNvGrpSpPr/>
-        <p:nvPr/>
-      </p:nvGrpSpPr>
-      <p:grpSpPr/>
-      <p:sp>
-        <p:nvSpPr>
-          <p:cNvPr id="2" name="TextBox 1"/>
-          <p:cNvSpPr txBox="1"/>
-          <p:nvPr/>
-        </p:nvSpPr>
-        <p:spPr>
-          <a:xfrm>
-            <a:off x="457200" y="274320"/>
-            <a:ext cx="11247120" cy="822960"/>
-          </a:xfrm>
-          <a:prstGeom prst="rect">
-            <a:avLst/>
-          </a:prstGeom>
-          <a:noFill/>
-        </p:spPr>
-        <p:txBody>
-          <a:bodyPr wrap="square">
-            <a:spAutoFit/>
-          </a:bodyPr>
-          <a:lstStyle/>
-          <a:p>
-            <a:r>
-              <a:rPr sz="3000" b="1">
-                <a:solidFill>
-                  <a:srgbClr val="1F2A44"/>
-                </a:solidFill>
-              </a:rPr>
-              <a:t>What We Found — Original Single-Checkpoint Run</a:t>
-            </a:r>
-          </a:p>
-        </p:txBody>
-      </p:sp>
-      <p:sp>
-        <p:nvSpPr>
-          <p:cNvPr id="3" name="TextBox 2"/>
-          <p:cNvSpPr txBox="1"/>
-          <p:nvPr/>
-        </p:nvSpPr>
-        <p:spPr>
-          <a:xfrm>
-            <a:off x="457200" y="1371600"/>
-            <a:ext cx="6675120" cy="5029200"/>
-          </a:xfrm>
-          <a:prstGeom prst="rect">
-            <a:avLst/>
-          </a:prstGeom>
-          <a:noFill/>
-        </p:spPr>
-        <p:txBody>
-          <a:bodyPr wrap="square">
-            <a:spAutoFit/>
-          </a:bodyPr>
-          <a:lstStyle/>
-          <a:p>
-            <a:pPr>
-              <a:spcAft>
-                <a:spcPts val="800"/>
-              </a:spcAft>
-            </a:pPr>
-            <a:r>
-              <a:rPr sz="1600" b="0">
-                <a:solidFill>
-                  <a:srgbClr val="1F2A44"/>
-                </a:solidFill>
-              </a:rPr>
-              <a:t>• Across all three locks, one objective (mae, pure reconstruction) was consistently the worst-compounding method</a:t>
-            </a:r>
-          </a:p>
-          <a:p>
-            <a:pPr lvl="1">
-              <a:spcAft>
-                <a:spcPts val="800"/>
-              </a:spcAft>
-            </a:pPr>
-            <a:r>
-              <a:rPr sz="1450" b="0">
-                <a:solidFill>
-                  <a:srgbClr val="555555"/>
-                </a:solidFill>
-              </a:rPr>
-              <a:t>– Highest cost / lowest success at essentially every setting tried</a:t>
-            </a:r>
-          </a:p>
-          <a:p>
-            <a:pPr>
-              <a:spcAft>
-                <a:spcPts val="800"/>
-              </a:spcAft>
-            </a:pPr>
-            <a:r>
-              <a:rPr sz="1600" b="0">
-                <a:solidFill>
-                  <a:srgbClr val="1F2A44"/>
-                </a:solidFill>
-              </a:rPr>
-              <a:t>• The best-calibrated objective (supLP120) reached a given safety budget at the lowest confidence threshold</a:t>
-            </a:r>
-          </a:p>
-          <a:p>
-            <a:pPr lvl="1">
-              <a:spcAft>
-                <a:spcPts val="800"/>
-              </a:spcAft>
-            </a:pPr>
-            <a:r>
-              <a:rPr sz="1450" b="0">
-                <a:solidFill>
-                  <a:srgbClr val="555555"/>
-                </a:solidFill>
-              </a:rPr>
-              <a:t>– Meaning it completes tasks faster at the same safety level</a:t>
-            </a:r>
-          </a:p>
-          <a:p>
-            <a:pPr lvl="1">
-              <a:spcAft>
-                <a:spcPts val="800"/>
-              </a:spcAft>
-            </a:pPr>
-            <a:r>
-              <a:rPr sz="1450" b="0">
-                <a:solidFill>
-                  <a:srgbClr val="555555"/>
-                </a:solidFill>
-              </a:rPr>
-              <a:t>– Calibration, not just accuracy, governs this tradeoff</a:t>
-            </a:r>
-          </a:p>
-          <a:p>
-            <a:pPr>
-              <a:spcAft>
-                <a:spcPts val="800"/>
-              </a:spcAft>
-            </a:pPr>
-            <a:r>
-              <a:rPr sz="1600" b="1">
-                <a:solidFill>
-                  <a:srgbClr val="1F2A44"/>
-                </a:solidFill>
-              </a:rPr>
-              <a:t>• Headline number quoted in the abstract:</a:t>
-            </a:r>
-          </a:p>
-          <a:p>
-            <a:pPr lvl="1">
-              <a:spcAft>
-                <a:spcPts val="800"/>
-              </a:spcAft>
-            </a:pPr>
-            <a:r>
-              <a:rPr sz="1450" b="0">
-                <a:solidFill>
-                  <a:srgbClr val="555555"/>
-                </a:solidFill>
-              </a:rPr>
-              <a:t>– A ~4-point recognition gap became a ~21-point task-success gap under compounding</a:t>
-            </a:r>
-          </a:p>
-        </p:txBody>
-      </p:sp>
-      <p:sp>
-        <p:nvSpPr>
-          <p:cNvPr id="4" name="Rectangle 3"/>
-          <p:cNvSpPr/>
-          <p:nvPr/>
-        </p:nvSpPr>
-        <p:spPr>
-          <a:xfrm>
-            <a:off x="7406640" y="1463040"/>
-            <a:ext cx="4206240" cy="4389120"/>
-          </a:xfrm>
-          <a:prstGeom prst="rect">
-            <a:avLst/>
-          </a:prstGeom>
-          <a:solidFill>
-            <a:srgbClr val="EEEEEE"/>
-          </a:solidFill>
-          <a:ln w="15875">
-            <a:solidFill>
-              <a:srgbClr val="555555"/>
-            </a:solidFill>
-          </a:ln>
-        </p:spPr>
-        <p:style>
-          <a:lnRef idx="1">
-            <a:schemeClr val="accent1"/>
-          </a:lnRef>
-          <a:fillRef idx="3">
-            <a:schemeClr val="accent1"/>
-          </a:fillRef>
-          <a:effectRef idx="2">
-            <a:schemeClr val="accent1"/>
-          </a:effectRef>
-          <a:fontRef idx="minor">
-            <a:schemeClr val="lt1"/>
-          </a:fontRef>
-        </p:style>
-        <p:txBody>
-          <a:bodyPr rtlCol="0" anchor="ctr" wrap="square"/>
-          <a:lstStyle/>
-          <a:p>
-            <a:pPr algn="ctr"/>
-            <a:r>
-              <a:rPr sz="1200" i="1">
-                <a:solidFill>
-                  <a:srgbClr val="555555"/>
-                </a:solidFill>
-              </a:rPr>
-              <a:t>[FIGURE]
-Bar chart: task-success by method
-at one operating point
-(trained_models/Phase3-controller/
-success_by_method.png)</a:t>
-            </a:r>
-          </a:p>
-        </p:txBody>
-      </p:sp>
-      <p:sp>
-        <p:nvSpPr>
-          <p:cNvPr id="5" name="TextBox 4"/>
-          <p:cNvSpPr txBox="1"/>
-          <p:nvPr/>
-        </p:nvSpPr>
-        <p:spPr>
-          <a:xfrm>
-            <a:off x="457200" y="6446520"/>
-            <a:ext cx="11247120" cy="320040"/>
-          </a:xfrm>
-          <a:prstGeom prst="rect">
-            <a:avLst/>
-          </a:prstGeom>
-          <a:noFill/>
-        </p:spPr>
-        <p:txBody>
-          <a:bodyPr wrap="none">
-            <a:spAutoFit/>
-          </a:bodyPr>
-          <a:lstStyle/>
-          <a:p>
-            <a:r>
-              <a:rPr sz="900">
-                <a:solidFill>
-                  <a:srgbClr val="555555"/>
-                </a:solidFill>
-              </a:rPr>
-              <a:t>paper/paper_abstract.md (original) · wiki/results/phase3-controller.md</a:t>
+              <a:t>wiki/concepts/controller.md §9 · paper/paper_method.md §8.1</a:t>
             </a:r>
           </a:p>
         </p:txBody>
@@ -4806,12 +4714,12 @@
           <a:lstStyle/>
           <a:p>
             <a:r>
-              <a:rPr sz="2600" b="1">
-                <a:solidFill>
-                  <a:srgbClr val="1F2A44"/>
-                </a:solidFill>
-              </a:rPr>
-              <a:t>What Changed After an Independent Full Retrain (2026-07-20)</a:t>
+              <a:rPr sz="2800" b="1">
+                <a:solidFill>
+                  <a:srgbClr val="1E7A3C"/>
+                </a:solidFill>
+              </a:rPr>
+              <a:t>Result: All Three Checks Agree</a:t>
             </a:r>
           </a:p>
         </p:txBody>
@@ -4825,7 +4733,7 @@
         <p:spPr>
           <a:xfrm>
             <a:off x="457200" y="914400"/>
-            <a:ext cx="11247120" cy="365760"/>
+            <a:ext cx="11247120" cy="411480"/>
           </a:xfrm>
           <a:prstGeom prst="rect">
             <a:avLst/>
@@ -4839,140 +4747,27 @@
           <a:lstStyle/>
           <a:p>
             <a:r>
-              <a:rPr sz="1300" i="1">
-                <a:solidFill>
-                  <a:srgbClr val="555555"/>
-                </a:solidFill>
-              </a:rPr>
-              <a:t>Every pretraining checkpoint independently retrained — different hardware, same code, first pinned/reproducible run ever</a:t>
-            </a:r>
-          </a:p>
-        </p:txBody>
-      </p:sp>
-      <p:sp>
-        <p:nvSpPr>
-          <p:cNvPr id="4" name="TextBox 3"/>
-          <p:cNvSpPr txBox="1"/>
-          <p:nvPr/>
-        </p:nvSpPr>
-        <p:spPr>
-          <a:xfrm>
-            <a:off x="457200" y="1325880"/>
-            <a:ext cx="6858000" cy="5029200"/>
-          </a:xfrm>
-          <a:prstGeom prst="rect">
-            <a:avLst/>
-          </a:prstGeom>
-          <a:noFill/>
-        </p:spPr>
-        <p:txBody>
-          <a:bodyPr wrap="square">
-            <a:spAutoFit/>
-          </a:bodyPr>
-          <a:lstStyle/>
-          <a:p>
-            <a:pPr>
-              <a:spcAft>
-                <a:spcPts val="800"/>
-              </a:spcAft>
-            </a:pPr>
-            <a:r>
-              <a:rPr sz="1500" b="1">
-                <a:solidFill>
-                  <a:srgbClr val="1F2A44"/>
-                </a:solidFill>
-              </a:rPr>
-              <a:t>• Lock 1 (randomized assignment, averaged over 120 draws): still shows mae worst — this reproduced</a:t>
-            </a:r>
-          </a:p>
-          <a:p>
-            <a:pPr>
-              <a:spcAft>
-                <a:spcPts val="800"/>
-              </a:spcAft>
-            </a:pPr>
-            <a:r>
-              <a:rPr sz="1500" b="1">
-                <a:solidFill>
-                  <a:srgbClr val="1F2A44"/>
-                </a:solidFill>
-              </a:rPr>
-              <a:t>• Locks 2 &amp; 3, and the single-config headline number — all use one FIXED, reliability-ranked assignment, not Lock 1’s 120 random draws</a:t>
-            </a:r>
-          </a:p>
-          <a:p>
-            <a:pPr lvl="1">
-              <a:spcAft>
-                <a:spcPts val="800"/>
-              </a:spcAft>
-            </a:pPr>
-            <a:r>
-              <a:rPr sz="1350" b="0">
-                <a:solidFill>
-                  <a:srgbClr val="555555"/>
-                </a:solidFill>
-              </a:rPr>
-              <a:t>– These now show a DIFFERENT method, supLP120, as worst — by a wide margin under harsh penalties</a:t>
-            </a:r>
-          </a:p>
-          <a:p>
-            <a:pPr>
-              <a:spcAft>
-                <a:spcPts val="800"/>
-              </a:spcAft>
-            </a:pPr>
-            <a:r>
-              <a:rPr sz="1500" b="1">
-                <a:solidFill>
-                  <a:srgbClr val="1F2A44"/>
-                </a:solidFill>
-              </a:rPr>
-              <a:t>• The abstract’s specific “4-point → 21-point” number does not reproduce</a:t>
-            </a:r>
-          </a:p>
-          <a:p>
-            <a:pPr lvl="1">
-              <a:spcAft>
-                <a:spcPts val="800"/>
-              </a:spcAft>
-            </a:pPr>
-            <a:r>
-              <a:rPr sz="1350" b="0">
-                <a:solidFill>
-                  <a:srgbClr val="555555"/>
-                </a:solidFill>
-              </a:rPr>
-              <a:t>– New task success at same config: supcon 0.975 (best) &gt; supMAE 0.927 &gt; scratch 0.898 &gt; mae 0.888 &gt; supLP120 0.790 (worst)</a:t>
-            </a:r>
-          </a:p>
-          <a:p>
-            <a:pPr lvl="1">
-              <a:spcAft>
-                <a:spcPts val="800"/>
-              </a:spcAft>
-            </a:pPr>
-            <a:r>
-              <a:rPr sz="1350" b="0">
-                <a:solidFill>
-                  <a:srgbClr val="555555"/>
-                </a:solidFill>
-              </a:rPr>
-              <a:t>– mae is no longer the worst method in this view</a:t>
+              <a:rPr sz="1500" i="0">
+                <a:solidFill>
+                  <a:srgbClr val="1E7A3C"/>
+                </a:solidFill>
+              </a:rPr>
+              <a:t>One pretraining objective — mae, pure reconstruction — compounds worst under every single stress test</a:t>
             </a:r>
           </a:p>
         </p:txBody>
       </p:sp>
       <p:graphicFrame>
         <p:nvGraphicFramePr>
-          <p:cNvPr id="5" name="Table 4"/>
+          <p:cNvPr id="4" name="Table 3"/>
           <p:cNvGraphicFramePr>
             <a:graphicFrameLocks noGrp="1"/>
           </p:cNvGraphicFramePr>
           <p:nvPr/>
         </p:nvGraphicFramePr>
         <p:xfrm>
-          <a:off x="457200" y="4343400"/>
-          <a:ext cx="11247120" cy="2103120"/>
+          <a:off x="365760" y="1554480"/>
+          <a:ext cx="5486400" cy="1371600"/>
         </p:xfrm>
         <a:graphic>
           <a:graphicData uri="http://schemas.openxmlformats.org/drawingml/2006/table">
@@ -4981,14 +4776,14 @@
                 <a:tableStyleId>{5C22544A-7EE6-4342-B048-85BDC9FD1C3A}</a:tableStyleId>
               </a:tblPr>
               <a:tblGrid>
-                <a:gridCol w="2103120"/>
-                <a:gridCol w="1828800"/>
-                <a:gridCol w="1828800"/>
-                <a:gridCol w="1828800"/>
-                <a:gridCol w="1828800"/>
-                <a:gridCol w="1828800"/>
+                <a:gridCol w="1371600"/>
+                <a:gridCol w="822960"/>
+                <a:gridCol w="822960"/>
+                <a:gridCol w="822960"/>
+                <a:gridCol w="822960"/>
+                <a:gridCol w="822960"/>
               </a:tblGrid>
-              <a:tr h="420624">
+              <a:tr h="457200">
                 <a:tc>
                   <a:txBody>
                     <a:bodyPr/>
@@ -5001,7 +4796,7 @@
                             <a:srgbClr val="FFFFFF"/>
                           </a:solidFill>
                         </a:rPr>
-                        <a:t>Cost severity</a:t>
+                        <a:t>Lock 1 (k=1)</a:t>
                       </a:r>
                     </a:p>
                   </a:txBody>
@@ -5023,7 +4818,7 @@
                             <a:srgbClr val="FFFFFF"/>
                           </a:solidFill>
                         </a:rPr>
-                        <a:t>mae</a:t>
+                        <a:t>scratch</a:t>
                       </a:r>
                     </a:p>
                   </a:txBody>
@@ -5045,7 +4840,7 @@
                             <a:srgbClr val="FFFFFF"/>
                           </a:solidFill>
                         </a:rPr>
-                        <a:t>scratch</a:t>
+                        <a:t>mae</a:t>
                       </a:r>
                     </a:p>
                   </a:txBody>
@@ -5067,7 +4862,7 @@
                             <a:srgbClr val="FFFFFF"/>
                           </a:solidFill>
                         </a:rPr>
-                        <a:t>supLP120</a:t>
+                        <a:t>supMAE</a:t>
                       </a:r>
                     </a:p>
                   </a:txBody>
@@ -5089,7 +4884,7 @@
                             <a:srgbClr val="FFFFFF"/>
                           </a:solidFill>
                         </a:rPr>
-                        <a:t>supMAE</a:t>
+                        <a:t>supLP120</a:t>
                       </a:r>
                     </a:p>
                   </a:txBody>
@@ -5122,7 +4917,7 @@
                   </a:tcPr>
                 </a:tc>
               </a:tr>
-              <a:tr h="420624">
+              <a:tr h="457200">
                 <a:tc>
                   <a:txBody>
                     <a:bodyPr/>
@@ -5135,7 +4930,7 @@
                             <a:srgbClr val="1F2A44"/>
                           </a:solidFill>
                         </a:rPr>
-                        <a:t>mild (2)</a:t>
+                        <a:t>τ=0 (ungated)</a:t>
                       </a:r>
                     </a:p>
                   </a:txBody>
@@ -5157,7 +4952,7 @@
                             <a:srgbClr val="1F2A44"/>
                           </a:solidFill>
                         </a:rPr>
-                        <a:t>15.6</a:t>
+                        <a:t>0.516</a:t>
                       </a:r>
                     </a:p>
                   </a:txBody>
@@ -5174,12 +4969,12 @@
                     <a:p>
                       <a:pPr algn="ctr"/>
                       <a:r>
-                        <a:rPr sz="1200">
-                          <a:solidFill>
-                            <a:srgbClr val="1F2A44"/>
-                          </a:solidFill>
-                        </a:rPr>
-                        <a:t>15.8</a:t>
+                        <a:rPr sz="1200" b="1">
+                          <a:solidFill>
+                            <a:srgbClr val="B02A2A"/>
+                          </a:solidFill>
+                        </a:rPr>
+                        <a:t>0.455</a:t>
                       </a:r>
                     </a:p>
                   </a:txBody>
@@ -5201,7 +4996,7 @@
                             <a:srgbClr val="1F2A44"/>
                           </a:solidFill>
                         </a:rPr>
-                        <a:t>15.0</a:t>
+                        <a:t>0.522</a:t>
                       </a:r>
                     </a:p>
                   </a:txBody>
@@ -5223,7 +5018,7 @@
                             <a:srgbClr val="1F2A44"/>
                           </a:solidFill>
                         </a:rPr>
-                        <a:t>14.8</a:t>
+                        <a:t>0.472</a:t>
                       </a:r>
                     </a:p>
                   </a:txBody>
@@ -5245,7 +5040,7 @@
                             <a:srgbClr val="1F2A44"/>
                           </a:solidFill>
                         </a:rPr>
-                        <a:t>14.3</a:t>
+                        <a:t>0.523</a:t>
                       </a:r>
                     </a:p>
                   </a:txBody>
@@ -5256,7 +5051,7 @@
                   </a:tcPr>
                 </a:tc>
               </a:tr>
-              <a:tr h="420624">
+              <a:tr h="457200">
                 <a:tc>
                   <a:txBody>
                     <a:bodyPr/>
@@ -5269,7 +5064,7 @@
                             <a:srgbClr val="1F2A44"/>
                           </a:solidFill>
                         </a:rPr>
-                        <a:t>moderate (20)</a:t>
+                        <a:t>τ=0.9 (gated)</a:t>
                       </a:r>
                     </a:p>
                   </a:txBody>
@@ -5291,7 +5086,7 @@
                             <a:srgbClr val="1F2A44"/>
                           </a:solidFill>
                         </a:rPr>
-                        <a:t>17.8</a:t>
+                        <a:t>0.714</a:t>
                       </a:r>
                     </a:p>
                   </a:txBody>
@@ -5308,12 +5103,12 @@
                     <a:p>
                       <a:pPr algn="ctr"/>
                       <a:r>
-                        <a:rPr sz="1200">
-                          <a:solidFill>
-                            <a:srgbClr val="1F2A44"/>
-                          </a:solidFill>
-                        </a:rPr>
-                        <a:t>17.9</a:t>
+                        <a:rPr sz="1200" b="1">
+                          <a:solidFill>
+                            <a:srgbClr val="B02A2A"/>
+                          </a:solidFill>
+                        </a:rPr>
+                        <a:t>0.650</a:t>
                       </a:r>
                     </a:p>
                   </a:txBody>
@@ -5335,7 +5130,7 @@
                             <a:srgbClr val="1F2A44"/>
                           </a:solidFill>
                         </a:rPr>
-                        <a:t>19.3</a:t>
+                        <a:t>0.717</a:t>
                       </a:r>
                     </a:p>
                   </a:txBody>
@@ -5357,7 +5152,7 @@
                             <a:srgbClr val="1F2A44"/>
                           </a:solidFill>
                         </a:rPr>
-                        <a:t>16.0</a:t>
+                        <a:t>0.703</a:t>
                       </a:r>
                     </a:p>
                   </a:txBody>
@@ -5379,275 +5174,7 @@
                             <a:srgbClr val="1F2A44"/>
                           </a:solidFill>
                         </a:rPr>
-                        <a:t>14.8</a:t>
-                      </a:r>
-                    </a:p>
-                  </a:txBody>
-                  <a:tcPr>
-                    <a:solidFill>
-                      <a:srgbClr val="F7F7F7"/>
-                    </a:solidFill>
-                  </a:tcPr>
-                </a:tc>
-              </a:tr>
-              <a:tr h="420624">
-                <a:tc>
-                  <a:txBody>
-                    <a:bodyPr/>
-                    <a:lstStyle/>
-                    <a:p>
-                      <a:pPr algn="ctr"/>
-                      <a:r>
-                        <a:rPr sz="1200">
-                          <a:solidFill>
-                            <a:srgbClr val="1F2A44"/>
-                          </a:solidFill>
-                        </a:rPr>
-                        <a:t>severe (50)</a:t>
-                      </a:r>
-                    </a:p>
-                  </a:txBody>
-                  <a:tcPr>
-                    <a:solidFill>
-                      <a:srgbClr val="F7F7F7"/>
-                    </a:solidFill>
-                  </a:tcPr>
-                </a:tc>
-                <a:tc>
-                  <a:txBody>
-                    <a:bodyPr/>
-                    <a:lstStyle/>
-                    <a:p>
-                      <a:pPr algn="ctr"/>
-                      <a:r>
-                        <a:rPr sz="1200">
-                          <a:solidFill>
-                            <a:srgbClr val="1F2A44"/>
-                          </a:solidFill>
-                        </a:rPr>
-                        <a:t>21.5</a:t>
-                      </a:r>
-                    </a:p>
-                  </a:txBody>
-                  <a:tcPr>
-                    <a:solidFill>
-                      <a:srgbClr val="F7F7F7"/>
-                    </a:solidFill>
-                  </a:tcPr>
-                </a:tc>
-                <a:tc>
-                  <a:txBody>
-                    <a:bodyPr/>
-                    <a:lstStyle/>
-                    <a:p>
-                      <a:pPr algn="ctr"/>
-                      <a:r>
-                        <a:rPr sz="1200">
-                          <a:solidFill>
-                            <a:srgbClr val="1F2A44"/>
-                          </a:solidFill>
-                        </a:rPr>
-                        <a:t>21.3</a:t>
-                      </a:r>
-                    </a:p>
-                  </a:txBody>
-                  <a:tcPr>
-                    <a:solidFill>
-                      <a:srgbClr val="F7F7F7"/>
-                    </a:solidFill>
-                  </a:tcPr>
-                </a:tc>
-                <a:tc>
-                  <a:txBody>
-                    <a:bodyPr/>
-                    <a:lstStyle/>
-                    <a:p>
-                      <a:pPr algn="ctr"/>
-                      <a:r>
-                        <a:rPr sz="1200">
-                          <a:solidFill>
-                            <a:srgbClr val="1F2A44"/>
-                          </a:solidFill>
-                        </a:rPr>
-                        <a:t>26.4</a:t>
-                      </a:r>
-                    </a:p>
-                  </a:txBody>
-                  <a:tcPr>
-                    <a:solidFill>
-                      <a:srgbClr val="F7F7F7"/>
-                    </a:solidFill>
-                  </a:tcPr>
-                </a:tc>
-                <a:tc>
-                  <a:txBody>
-                    <a:bodyPr/>
-                    <a:lstStyle/>
-                    <a:p>
-                      <a:pPr algn="ctr"/>
-                      <a:r>
-                        <a:rPr sz="1200">
-                          <a:solidFill>
-                            <a:srgbClr val="1F2A44"/>
-                          </a:solidFill>
-                        </a:rPr>
-                        <a:t>17.9</a:t>
-                      </a:r>
-                    </a:p>
-                  </a:txBody>
-                  <a:tcPr>
-                    <a:solidFill>
-                      <a:srgbClr val="F7F7F7"/>
-                    </a:solidFill>
-                  </a:tcPr>
-                </a:tc>
-                <a:tc>
-                  <a:txBody>
-                    <a:bodyPr/>
-                    <a:lstStyle/>
-                    <a:p>
-                      <a:pPr algn="ctr"/>
-                      <a:r>
-                        <a:rPr sz="1200">
-                          <a:solidFill>
-                            <a:srgbClr val="1F2A44"/>
-                          </a:solidFill>
-                        </a:rPr>
-                        <a:t>15.6</a:t>
-                      </a:r>
-                    </a:p>
-                  </a:txBody>
-                  <a:tcPr>
-                    <a:solidFill>
-                      <a:srgbClr val="F7F7F7"/>
-                    </a:solidFill>
-                  </a:tcPr>
-                </a:tc>
-              </a:tr>
-              <a:tr h="420624">
-                <a:tc>
-                  <a:txBody>
-                    <a:bodyPr/>
-                    <a:lstStyle/>
-                    <a:p>
-                      <a:pPr algn="ctr"/>
-                      <a:r>
-                        <a:rPr sz="1200">
-                          <a:solidFill>
-                            <a:srgbClr val="1F2A44"/>
-                          </a:solidFill>
-                        </a:rPr>
-                        <a:t>~infinite</a:t>
-                      </a:r>
-                    </a:p>
-                  </a:txBody>
-                  <a:tcPr>
-                    <a:solidFill>
-                      <a:srgbClr val="F7F7F7"/>
-                    </a:solidFill>
-                  </a:tcPr>
-                </a:tc>
-                <a:tc>
-                  <a:txBody>
-                    <a:bodyPr/>
-                    <a:lstStyle/>
-                    <a:p>
-                      <a:pPr algn="ctr"/>
-                      <a:r>
-                        <a:rPr sz="1200">
-                          <a:solidFill>
-                            <a:srgbClr val="1F2A44"/>
-                          </a:solidFill>
-                        </a:rPr>
-                        <a:t>123,015</a:t>
-                      </a:r>
-                    </a:p>
-                  </a:txBody>
-                  <a:tcPr>
-                    <a:solidFill>
-                      <a:srgbClr val="F7F7F7"/>
-                    </a:solidFill>
-                  </a:tcPr>
-                </a:tc>
-                <a:tc>
-                  <a:txBody>
-                    <a:bodyPr/>
-                    <a:lstStyle/>
-                    <a:p>
-                      <a:pPr algn="ctr"/>
-                      <a:r>
-                        <a:rPr sz="1200">
-                          <a:solidFill>
-                            <a:srgbClr val="1F2A44"/>
-                          </a:solidFill>
-                        </a:rPr>
-                        <a:t>115,016</a:t>
-                      </a:r>
-                    </a:p>
-                  </a:txBody>
-                  <a:tcPr>
-                    <a:solidFill>
-                      <a:srgbClr val="F7F7F7"/>
-                    </a:solidFill>
-                  </a:tcPr>
-                </a:tc>
-                <a:tc>
-                  <a:txBody>
-                    <a:bodyPr/>
-                    <a:lstStyle/>
-                    <a:p>
-                      <a:pPr algn="ctr"/>
-                      <a:r>
-                        <a:rPr sz="1200">
-                          <a:solidFill>
-                            <a:srgbClr val="1F2A44"/>
-                          </a:solidFill>
-                        </a:rPr>
-                        <a:t>237,681</a:t>
-                      </a:r>
-                    </a:p>
-                  </a:txBody>
-                  <a:tcPr>
-                    <a:solidFill>
-                      <a:srgbClr val="F7F7F7"/>
-                    </a:solidFill>
-                  </a:tcPr>
-                </a:tc>
-                <a:tc>
-                  <a:txBody>
-                    <a:bodyPr/>
-                    <a:lstStyle/>
-                    <a:p>
-                      <a:pPr algn="ctr"/>
-                      <a:r>
-                        <a:rPr sz="1200">
-                          <a:solidFill>
-                            <a:srgbClr val="1F2A44"/>
-                          </a:solidFill>
-                        </a:rPr>
-                        <a:t>63,681</a:t>
-                      </a:r>
-                    </a:p>
-                  </a:txBody>
-                  <a:tcPr>
-                    <a:solidFill>
-                      <a:srgbClr val="F7F7F7"/>
-                    </a:solidFill>
-                  </a:tcPr>
-                </a:tc>
-                <a:tc>
-                  <a:txBody>
-                    <a:bodyPr/>
-                    <a:lstStyle/>
-                    <a:p>
-                      <a:pPr algn="ctr"/>
-                      <a:r>
-                        <a:rPr sz="1200">
-                          <a:solidFill>
-                            <a:srgbClr val="1F2A44"/>
-                          </a:solidFill>
-                        </a:rPr>
-                        <a:t>27,014</a:t>
+                        <a:t>0.740</a:t>
                       </a:r>
                     </a:p>
                   </a:txBody>
@@ -5662,9 +5189,1090 @@
           </a:graphicData>
         </a:graphic>
       </p:graphicFrame>
-      <p:sp>
-        <p:nvSpPr>
-          <p:cNvPr id="6" name="TextBox 5"/>
+      <p:graphicFrame>
+        <p:nvGraphicFramePr>
+          <p:cNvPr id="5" name="Table 4"/>
+          <p:cNvGraphicFramePr>
+            <a:graphicFrameLocks noGrp="1"/>
+          </p:cNvGraphicFramePr>
+          <p:nvPr/>
+        </p:nvGraphicFramePr>
+        <p:xfrm>
+          <a:off x="6309360" y="1554480"/>
+          <a:ext cx="5669280" cy="1828800"/>
+        </p:xfrm>
+        <a:graphic>
+          <a:graphicData uri="http://schemas.openxmlformats.org/drawingml/2006/table">
+            <a:tbl>
+              <a:tblPr firstRow="1" bandRow="1">
+                <a:tableStyleId>{5C22544A-7EE6-4342-B048-85BDC9FD1C3A}</a:tableStyleId>
+              </a:tblPr>
+              <a:tblGrid>
+                <a:gridCol w="1554480"/>
+                <a:gridCol w="822960"/>
+                <a:gridCol w="822960"/>
+                <a:gridCol w="822960"/>
+                <a:gridCol w="822960"/>
+                <a:gridCol w="822960"/>
+              </a:tblGrid>
+              <a:tr h="457200">
+                <a:tc>
+                  <a:txBody>
+                    <a:bodyPr/>
+                    <a:lstStyle/>
+                    <a:p>
+                      <a:pPr algn="ctr"/>
+                      <a:r>
+                        <a:rPr sz="1200" b="1">
+                          <a:solidFill>
+                            <a:srgbClr val="FFFFFF"/>
+                          </a:solidFill>
+                        </a:rPr>
+                        <a:t>Lock 2, k=1 (lower=better)</a:t>
+                      </a:r>
+                    </a:p>
+                  </a:txBody>
+                  <a:tcPr>
+                    <a:solidFill>
+                      <a:srgbClr val="1F2A44"/>
+                    </a:solidFill>
+                  </a:tcPr>
+                </a:tc>
+                <a:tc>
+                  <a:txBody>
+                    <a:bodyPr/>
+                    <a:lstStyle/>
+                    <a:p>
+                      <a:pPr algn="ctr"/>
+                      <a:r>
+                        <a:rPr sz="1200" b="1">
+                          <a:solidFill>
+                            <a:srgbClr val="FFFFFF"/>
+                          </a:solidFill>
+                        </a:rPr>
+                        <a:t>mae</a:t>
+                      </a:r>
+                    </a:p>
+                  </a:txBody>
+                  <a:tcPr>
+                    <a:solidFill>
+                      <a:srgbClr val="1F2A44"/>
+                    </a:solidFill>
+                  </a:tcPr>
+                </a:tc>
+                <a:tc>
+                  <a:txBody>
+                    <a:bodyPr/>
+                    <a:lstStyle/>
+                    <a:p>
+                      <a:pPr algn="ctr"/>
+                      <a:r>
+                        <a:rPr sz="1200" b="1">
+                          <a:solidFill>
+                            <a:srgbClr val="FFFFFF"/>
+                          </a:solidFill>
+                        </a:rPr>
+                        <a:t>scratch</a:t>
+                      </a:r>
+                    </a:p>
+                  </a:txBody>
+                  <a:tcPr>
+                    <a:solidFill>
+                      <a:srgbClr val="1F2A44"/>
+                    </a:solidFill>
+                  </a:tcPr>
+                </a:tc>
+                <a:tc>
+                  <a:txBody>
+                    <a:bodyPr/>
+                    <a:lstStyle/>
+                    <a:p>
+                      <a:pPr algn="ctr"/>
+                      <a:r>
+                        <a:rPr sz="1200" b="1">
+                          <a:solidFill>
+                            <a:srgbClr val="FFFFFF"/>
+                          </a:solidFill>
+                        </a:rPr>
+                        <a:t>supLP120</a:t>
+                      </a:r>
+                    </a:p>
+                  </a:txBody>
+                  <a:tcPr>
+                    <a:solidFill>
+                      <a:srgbClr val="1F2A44"/>
+                    </a:solidFill>
+                  </a:tcPr>
+                </a:tc>
+                <a:tc>
+                  <a:txBody>
+                    <a:bodyPr/>
+                    <a:lstStyle/>
+                    <a:p>
+                      <a:pPr algn="ctr"/>
+                      <a:r>
+                        <a:rPr sz="1200" b="1">
+                          <a:solidFill>
+                            <a:srgbClr val="FFFFFF"/>
+                          </a:solidFill>
+                        </a:rPr>
+                        <a:t>supMAE</a:t>
+                      </a:r>
+                    </a:p>
+                  </a:txBody>
+                  <a:tcPr>
+                    <a:solidFill>
+                      <a:srgbClr val="1F2A44"/>
+                    </a:solidFill>
+                  </a:tcPr>
+                </a:tc>
+                <a:tc>
+                  <a:txBody>
+                    <a:bodyPr/>
+                    <a:lstStyle/>
+                    <a:p>
+                      <a:pPr algn="ctr"/>
+                      <a:r>
+                        <a:rPr sz="1200" b="1">
+                          <a:solidFill>
+                            <a:srgbClr val="FFFFFF"/>
+                          </a:solidFill>
+                        </a:rPr>
+                        <a:t>supcon</a:t>
+                      </a:r>
+                    </a:p>
+                  </a:txBody>
+                  <a:tcPr>
+                    <a:solidFill>
+                      <a:srgbClr val="1F2A44"/>
+                    </a:solidFill>
+                  </a:tcPr>
+                </a:tc>
+              </a:tr>
+              <a:tr h="457200">
+                <a:tc>
+                  <a:txBody>
+                    <a:bodyPr/>
+                    <a:lstStyle/>
+                    <a:p>
+                      <a:pPr algn="ctr"/>
+                      <a:r>
+                        <a:rPr sz="1200">
+                          <a:solidFill>
+                            <a:srgbClr val="1F2A44"/>
+                          </a:solidFill>
+                        </a:rPr>
+                        <a:t>mild</a:t>
+                      </a:r>
+                    </a:p>
+                  </a:txBody>
+                  <a:tcPr>
+                    <a:solidFill>
+                      <a:srgbClr val="F7F7F7"/>
+                    </a:solidFill>
+                  </a:tcPr>
+                </a:tc>
+                <a:tc>
+                  <a:txBody>
+                    <a:bodyPr/>
+                    <a:lstStyle/>
+                    <a:p>
+                      <a:pPr algn="ctr"/>
+                      <a:r>
+                        <a:rPr sz="1200" b="1">
+                          <a:solidFill>
+                            <a:srgbClr val="B02A2A"/>
+                          </a:solidFill>
+                        </a:rPr>
+                        <a:t>18.3</a:t>
+                      </a:r>
+                    </a:p>
+                  </a:txBody>
+                  <a:tcPr>
+                    <a:solidFill>
+                      <a:srgbClr val="F7F7F7"/>
+                    </a:solidFill>
+                  </a:tcPr>
+                </a:tc>
+                <a:tc>
+                  <a:txBody>
+                    <a:bodyPr/>
+                    <a:lstStyle/>
+                    <a:p>
+                      <a:pPr algn="ctr"/>
+                      <a:r>
+                        <a:rPr sz="1200">
+                          <a:solidFill>
+                            <a:srgbClr val="1F2A44"/>
+                          </a:solidFill>
+                        </a:rPr>
+                        <a:t>17.5</a:t>
+                      </a:r>
+                    </a:p>
+                  </a:txBody>
+                  <a:tcPr>
+                    <a:solidFill>
+                      <a:srgbClr val="F7F7F7"/>
+                    </a:solidFill>
+                  </a:tcPr>
+                </a:tc>
+                <a:tc>
+                  <a:txBody>
+                    <a:bodyPr/>
+                    <a:lstStyle/>
+                    <a:p>
+                      <a:pPr algn="ctr"/>
+                      <a:r>
+                        <a:rPr sz="1200">
+                          <a:solidFill>
+                            <a:srgbClr val="1F2A44"/>
+                          </a:solidFill>
+                        </a:rPr>
+                        <a:t>17.7</a:t>
+                      </a:r>
+                    </a:p>
+                  </a:txBody>
+                  <a:tcPr>
+                    <a:solidFill>
+                      <a:srgbClr val="F7F7F7"/>
+                    </a:solidFill>
+                  </a:tcPr>
+                </a:tc>
+                <a:tc>
+                  <a:txBody>
+                    <a:bodyPr/>
+                    <a:lstStyle/>
+                    <a:p>
+                      <a:pPr algn="ctr"/>
+                      <a:r>
+                        <a:rPr sz="1200">
+                          <a:solidFill>
+                            <a:srgbClr val="1F2A44"/>
+                          </a:solidFill>
+                        </a:rPr>
+                        <a:t>17.1</a:t>
+                      </a:r>
+                    </a:p>
+                  </a:txBody>
+                  <a:tcPr>
+                    <a:solidFill>
+                      <a:srgbClr val="F7F7F7"/>
+                    </a:solidFill>
+                  </a:tcPr>
+                </a:tc>
+                <a:tc>
+                  <a:txBody>
+                    <a:bodyPr/>
+                    <a:lstStyle/>
+                    <a:p>
+                      <a:pPr algn="ctr"/>
+                      <a:r>
+                        <a:rPr sz="1200">
+                          <a:solidFill>
+                            <a:srgbClr val="1F2A44"/>
+                          </a:solidFill>
+                        </a:rPr>
+                        <a:t>17.4</a:t>
+                      </a:r>
+                    </a:p>
+                  </a:txBody>
+                  <a:tcPr>
+                    <a:solidFill>
+                      <a:srgbClr val="F7F7F7"/>
+                    </a:solidFill>
+                  </a:tcPr>
+                </a:tc>
+              </a:tr>
+              <a:tr h="457200">
+                <a:tc>
+                  <a:txBody>
+                    <a:bodyPr/>
+                    <a:lstStyle/>
+                    <a:p>
+                      <a:pPr algn="ctr"/>
+                      <a:r>
+                        <a:rPr sz="1200">
+                          <a:solidFill>
+                            <a:srgbClr val="1F2A44"/>
+                          </a:solidFill>
+                        </a:rPr>
+                        <a:t>moderate</a:t>
+                      </a:r>
+                    </a:p>
+                  </a:txBody>
+                  <a:tcPr>
+                    <a:solidFill>
+                      <a:srgbClr val="F7F7F7"/>
+                    </a:solidFill>
+                  </a:tcPr>
+                </a:tc>
+                <a:tc>
+                  <a:txBody>
+                    <a:bodyPr/>
+                    <a:lstStyle/>
+                    <a:p>
+                      <a:pPr algn="ctr"/>
+                      <a:r>
+                        <a:rPr sz="1200" b="1">
+                          <a:solidFill>
+                            <a:srgbClr val="B02A2A"/>
+                          </a:solidFill>
+                        </a:rPr>
+                        <a:t>32.3</a:t>
+                      </a:r>
+                    </a:p>
+                  </a:txBody>
+                  <a:tcPr>
+                    <a:solidFill>
+                      <a:srgbClr val="F7F7F7"/>
+                    </a:solidFill>
+                  </a:tcPr>
+                </a:tc>
+                <a:tc>
+                  <a:txBody>
+                    <a:bodyPr/>
+                    <a:lstStyle/>
+                    <a:p>
+                      <a:pPr algn="ctr"/>
+                      <a:r>
+                        <a:rPr sz="1200">
+                          <a:solidFill>
+                            <a:srgbClr val="1F2A44"/>
+                          </a:solidFill>
+                        </a:rPr>
+                        <a:t>29.0</a:t>
+                      </a:r>
+                    </a:p>
+                  </a:txBody>
+                  <a:tcPr>
+                    <a:solidFill>
+                      <a:srgbClr val="F7F7F7"/>
+                    </a:solidFill>
+                  </a:tcPr>
+                </a:tc>
+                <a:tc>
+                  <a:txBody>
+                    <a:bodyPr/>
+                    <a:lstStyle/>
+                    <a:p>
+                      <a:pPr algn="ctr"/>
+                      <a:r>
+                        <a:rPr sz="1200">
+                          <a:solidFill>
+                            <a:srgbClr val="1F2A44"/>
+                          </a:solidFill>
+                        </a:rPr>
+                        <a:t>30.4</a:t>
+                      </a:r>
+                    </a:p>
+                  </a:txBody>
+                  <a:tcPr>
+                    <a:solidFill>
+                      <a:srgbClr val="F7F7F7"/>
+                    </a:solidFill>
+                  </a:tcPr>
+                </a:tc>
+                <a:tc>
+                  <a:txBody>
+                    <a:bodyPr/>
+                    <a:lstStyle/>
+                    <a:p>
+                      <a:pPr algn="ctr"/>
+                      <a:r>
+                        <a:rPr sz="1200" b="1">
+                          <a:solidFill>
+                            <a:srgbClr val="1E7A3C"/>
+                          </a:solidFill>
+                        </a:rPr>
+                        <a:t>28.5</a:t>
+                      </a:r>
+                    </a:p>
+                  </a:txBody>
+                  <a:tcPr>
+                    <a:solidFill>
+                      <a:srgbClr val="F7F7F7"/>
+                    </a:solidFill>
+                  </a:tcPr>
+                </a:tc>
+                <a:tc>
+                  <a:txBody>
+                    <a:bodyPr/>
+                    <a:lstStyle/>
+                    <a:p>
+                      <a:pPr algn="ctr"/>
+                      <a:r>
+                        <a:rPr sz="1200">
+                          <a:solidFill>
+                            <a:srgbClr val="1F2A44"/>
+                          </a:solidFill>
+                        </a:rPr>
+                        <a:t>28.6</a:t>
+                      </a:r>
+                    </a:p>
+                  </a:txBody>
+                  <a:tcPr>
+                    <a:solidFill>
+                      <a:srgbClr val="F7F7F7"/>
+                    </a:solidFill>
+                  </a:tcPr>
+                </a:tc>
+              </a:tr>
+              <a:tr h="457200">
+                <a:tc>
+                  <a:txBody>
+                    <a:bodyPr/>
+                    <a:lstStyle/>
+                    <a:p>
+                      <a:pPr algn="ctr"/>
+                      <a:r>
+                        <a:rPr sz="1200">
+                          <a:solidFill>
+                            <a:srgbClr val="1F2A44"/>
+                          </a:solidFill>
+                        </a:rPr>
+                        <a:t>severe</a:t>
+                      </a:r>
+                    </a:p>
+                  </a:txBody>
+                  <a:tcPr>
+                    <a:solidFill>
+                      <a:srgbClr val="F7F7F7"/>
+                    </a:solidFill>
+                  </a:tcPr>
+                </a:tc>
+                <a:tc>
+                  <a:txBody>
+                    <a:bodyPr/>
+                    <a:lstStyle/>
+                    <a:p>
+                      <a:pPr algn="ctr"/>
+                      <a:r>
+                        <a:rPr sz="1200" b="1">
+                          <a:solidFill>
+                            <a:srgbClr val="B02A2A"/>
+                          </a:solidFill>
+                        </a:rPr>
+                        <a:t>55.5</a:t>
+                      </a:r>
+                    </a:p>
+                  </a:txBody>
+                  <a:tcPr>
+                    <a:solidFill>
+                      <a:srgbClr val="F7F7F7"/>
+                    </a:solidFill>
+                  </a:tcPr>
+                </a:tc>
+                <a:tc>
+                  <a:txBody>
+                    <a:bodyPr/>
+                    <a:lstStyle/>
+                    <a:p>
+                      <a:pPr algn="ctr"/>
+                      <a:r>
+                        <a:rPr sz="1200">
+                          <a:solidFill>
+                            <a:srgbClr val="1F2A44"/>
+                          </a:solidFill>
+                        </a:rPr>
+                        <a:t>48.3</a:t>
+                      </a:r>
+                    </a:p>
+                  </a:txBody>
+                  <a:tcPr>
+                    <a:solidFill>
+                      <a:srgbClr val="F7F7F7"/>
+                    </a:solidFill>
+                  </a:tcPr>
+                </a:tc>
+                <a:tc>
+                  <a:txBody>
+                    <a:bodyPr/>
+                    <a:lstStyle/>
+                    <a:p>
+                      <a:pPr algn="ctr"/>
+                      <a:r>
+                        <a:rPr sz="1200">
+                          <a:solidFill>
+                            <a:srgbClr val="1F2A44"/>
+                          </a:solidFill>
+                        </a:rPr>
+                        <a:t>51.2</a:t>
+                      </a:r>
+                    </a:p>
+                  </a:txBody>
+                  <a:tcPr>
+                    <a:solidFill>
+                      <a:srgbClr val="F7F7F7"/>
+                    </a:solidFill>
+                  </a:tcPr>
+                </a:tc>
+                <a:tc>
+                  <a:txBody>
+                    <a:bodyPr/>
+                    <a:lstStyle/>
+                    <a:p>
+                      <a:pPr algn="ctr"/>
+                      <a:r>
+                        <a:rPr sz="1200">
+                          <a:solidFill>
+                            <a:srgbClr val="1F2A44"/>
+                          </a:solidFill>
+                        </a:rPr>
+                        <a:t>47.1</a:t>
+                      </a:r>
+                    </a:p>
+                  </a:txBody>
+                  <a:tcPr>
+                    <a:solidFill>
+                      <a:srgbClr val="F7F7F7"/>
+                    </a:solidFill>
+                  </a:tcPr>
+                </a:tc>
+                <a:tc>
+                  <a:txBody>
+                    <a:bodyPr/>
+                    <a:lstStyle/>
+                    <a:p>
+                      <a:pPr algn="ctr"/>
+                      <a:r>
+                        <a:rPr sz="1200">
+                          <a:solidFill>
+                            <a:srgbClr val="1F2A44"/>
+                          </a:solidFill>
+                        </a:rPr>
+                        <a:t>47.8</a:t>
+                      </a:r>
+                    </a:p>
+                  </a:txBody>
+                  <a:tcPr>
+                    <a:solidFill>
+                      <a:srgbClr val="F7F7F7"/>
+                    </a:solidFill>
+                  </a:tcPr>
+                </a:tc>
+              </a:tr>
+            </a:tbl>
+          </a:graphicData>
+        </a:graphic>
+      </p:graphicFrame>
+      <p:graphicFrame>
+        <p:nvGraphicFramePr>
+          <p:cNvPr id="6" name="Table 5"/>
+          <p:cNvGraphicFramePr>
+            <a:graphicFrameLocks noGrp="1"/>
+          </p:cNvGraphicFramePr>
+          <p:nvPr/>
+        </p:nvGraphicFramePr>
+        <p:xfrm>
+          <a:off x="365760" y="3566160"/>
+          <a:ext cx="5486400" cy="1371600"/>
+        </p:xfrm>
+        <a:graphic>
+          <a:graphicData uri="http://schemas.openxmlformats.org/drawingml/2006/table">
+            <a:tbl>
+              <a:tblPr firstRow="1" bandRow="1">
+                <a:tableStyleId>{5C22544A-7EE6-4342-B048-85BDC9FD1C3A}</a:tableStyleId>
+              </a:tblPr>
+              <a:tblGrid>
+                <a:gridCol w="1371600"/>
+                <a:gridCol w="822960"/>
+                <a:gridCol w="822960"/>
+                <a:gridCol w="822960"/>
+                <a:gridCol w="822960"/>
+                <a:gridCol w="822960"/>
+              </a:tblGrid>
+              <a:tr h="457200">
+                <a:tc>
+                  <a:txBody>
+                    <a:bodyPr/>
+                    <a:lstStyle/>
+                    <a:p>
+                      <a:pPr algn="ctr"/>
+                      <a:r>
+                        <a:rPr sz="1200" b="1">
+                          <a:solidFill>
+                            <a:srgbClr val="FFFFFF"/>
+                          </a:solidFill>
+                        </a:rPr>
+                        <a:t>Lock 3, 1% budget</a:t>
+                      </a:r>
+                    </a:p>
+                  </a:txBody>
+                  <a:tcPr>
+                    <a:solidFill>
+                      <a:srgbClr val="1F2A44"/>
+                    </a:solidFill>
+                  </a:tcPr>
+                </a:tc>
+                <a:tc>
+                  <a:txBody>
+                    <a:bodyPr/>
+                    <a:lstStyle/>
+                    <a:p>
+                      <a:pPr algn="ctr"/>
+                      <a:r>
+                        <a:rPr sz="1200" b="1">
+                          <a:solidFill>
+                            <a:srgbClr val="FFFFFF"/>
+                          </a:solidFill>
+                        </a:rPr>
+                        <a:t>mae</a:t>
+                      </a:r>
+                    </a:p>
+                  </a:txBody>
+                  <a:tcPr>
+                    <a:solidFill>
+                      <a:srgbClr val="1F2A44"/>
+                    </a:solidFill>
+                  </a:tcPr>
+                </a:tc>
+                <a:tc>
+                  <a:txBody>
+                    <a:bodyPr/>
+                    <a:lstStyle/>
+                    <a:p>
+                      <a:pPr algn="ctr"/>
+                      <a:r>
+                        <a:rPr sz="1200" b="1">
+                          <a:solidFill>
+                            <a:srgbClr val="FFFFFF"/>
+                          </a:solidFill>
+                        </a:rPr>
+                        <a:t>scratch</a:t>
+                      </a:r>
+                    </a:p>
+                  </a:txBody>
+                  <a:tcPr>
+                    <a:solidFill>
+                      <a:srgbClr val="1F2A44"/>
+                    </a:solidFill>
+                  </a:tcPr>
+                </a:tc>
+                <a:tc>
+                  <a:txBody>
+                    <a:bodyPr/>
+                    <a:lstStyle/>
+                    <a:p>
+                      <a:pPr algn="ctr"/>
+                      <a:r>
+                        <a:rPr sz="1200" b="1">
+                          <a:solidFill>
+                            <a:srgbClr val="FFFFFF"/>
+                          </a:solidFill>
+                        </a:rPr>
+                        <a:t>supLP120</a:t>
+                      </a:r>
+                    </a:p>
+                  </a:txBody>
+                  <a:tcPr>
+                    <a:solidFill>
+                      <a:srgbClr val="1F2A44"/>
+                    </a:solidFill>
+                  </a:tcPr>
+                </a:tc>
+                <a:tc>
+                  <a:txBody>
+                    <a:bodyPr/>
+                    <a:lstStyle/>
+                    <a:p>
+                      <a:pPr algn="ctr"/>
+                      <a:r>
+                        <a:rPr sz="1200" b="1">
+                          <a:solidFill>
+                            <a:srgbClr val="FFFFFF"/>
+                          </a:solidFill>
+                        </a:rPr>
+                        <a:t>supMAE</a:t>
+                      </a:r>
+                    </a:p>
+                  </a:txBody>
+                  <a:tcPr>
+                    <a:solidFill>
+                      <a:srgbClr val="1F2A44"/>
+                    </a:solidFill>
+                  </a:tcPr>
+                </a:tc>
+                <a:tc>
+                  <a:txBody>
+                    <a:bodyPr/>
+                    <a:lstStyle/>
+                    <a:p>
+                      <a:pPr algn="ctr"/>
+                      <a:r>
+                        <a:rPr sz="1200" b="1">
+                          <a:solidFill>
+                            <a:srgbClr val="FFFFFF"/>
+                          </a:solidFill>
+                        </a:rPr>
+                        <a:t>supcon</a:t>
+                      </a:r>
+                    </a:p>
+                  </a:txBody>
+                  <a:tcPr>
+                    <a:solidFill>
+                      <a:srgbClr val="1F2A44"/>
+                    </a:solidFill>
+                  </a:tcPr>
+                </a:tc>
+              </a:tr>
+              <a:tr h="457200">
+                <a:tc>
+                  <a:txBody>
+                    <a:bodyPr/>
+                    <a:lstStyle/>
+                    <a:p>
+                      <a:pPr algn="ctr"/>
+                      <a:r>
+                        <a:rPr sz="1200">
+                          <a:solidFill>
+                            <a:srgbClr val="1F2A44"/>
+                          </a:solidFill>
+                        </a:rPr>
+                        <a:t>k=1 success</a:t>
+                      </a:r>
+                    </a:p>
+                  </a:txBody>
+                  <a:tcPr>
+                    <a:solidFill>
+                      <a:srgbClr val="F7F7F7"/>
+                    </a:solidFill>
+                  </a:tcPr>
+                </a:tc>
+                <a:tc>
+                  <a:txBody>
+                    <a:bodyPr/>
+                    <a:lstStyle/>
+                    <a:p>
+                      <a:pPr algn="ctr"/>
+                      <a:r>
+                        <a:rPr sz="1200" b="1">
+                          <a:solidFill>
+                            <a:srgbClr val="B02A2A"/>
+                          </a:solidFill>
+                        </a:rPr>
+                        <a:t>0.360</a:t>
+                      </a:r>
+                    </a:p>
+                  </a:txBody>
+                  <a:tcPr>
+                    <a:solidFill>
+                      <a:srgbClr val="F7F7F7"/>
+                    </a:solidFill>
+                  </a:tcPr>
+                </a:tc>
+                <a:tc>
+                  <a:txBody>
+                    <a:bodyPr/>
+                    <a:lstStyle/>
+                    <a:p>
+                      <a:pPr algn="ctr"/>
+                      <a:r>
+                        <a:rPr sz="1200">
+                          <a:solidFill>
+                            <a:srgbClr val="1F2A44"/>
+                          </a:solidFill>
+                        </a:rPr>
+                        <a:t>0.514</a:t>
+                      </a:r>
+                    </a:p>
+                  </a:txBody>
+                  <a:tcPr>
+                    <a:solidFill>
+                      <a:srgbClr val="F7F7F7"/>
+                    </a:solidFill>
+                  </a:tcPr>
+                </a:tc>
+                <a:tc>
+                  <a:txBody>
+                    <a:bodyPr/>
+                    <a:lstStyle/>
+                    <a:p>
+                      <a:pPr algn="ctr"/>
+                      <a:r>
+                        <a:rPr sz="1200">
+                          <a:solidFill>
+                            <a:srgbClr val="1F2A44"/>
+                          </a:solidFill>
+                        </a:rPr>
+                        <a:t>0.561</a:t>
+                      </a:r>
+                    </a:p>
+                  </a:txBody>
+                  <a:tcPr>
+                    <a:solidFill>
+                      <a:srgbClr val="F7F7F7"/>
+                    </a:solidFill>
+                  </a:tcPr>
+                </a:tc>
+                <a:tc>
+                  <a:txBody>
+                    <a:bodyPr/>
+                    <a:lstStyle/>
+                    <a:p>
+                      <a:pPr algn="ctr"/>
+                      <a:r>
+                        <a:rPr sz="1200">
+                          <a:solidFill>
+                            <a:srgbClr val="1F2A44"/>
+                          </a:solidFill>
+                        </a:rPr>
+                        <a:t>0.524</a:t>
+                      </a:r>
+                    </a:p>
+                  </a:txBody>
+                  <a:tcPr>
+                    <a:solidFill>
+                      <a:srgbClr val="F7F7F7"/>
+                    </a:solidFill>
+                  </a:tcPr>
+                </a:tc>
+                <a:tc>
+                  <a:txBody>
+                    <a:bodyPr/>
+                    <a:lstStyle/>
+                    <a:p>
+                      <a:pPr algn="ctr"/>
+                      <a:r>
+                        <a:rPr sz="1200" b="1">
+                          <a:solidFill>
+                            <a:srgbClr val="1E7A3C"/>
+                          </a:solidFill>
+                        </a:rPr>
+                        <a:t>0.646</a:t>
+                      </a:r>
+                    </a:p>
+                  </a:txBody>
+                  <a:tcPr>
+                    <a:solidFill>
+                      <a:srgbClr val="F7F7F7"/>
+                    </a:solidFill>
+                  </a:tcPr>
+                </a:tc>
+              </a:tr>
+              <a:tr h="457200">
+                <a:tc>
+                  <a:txBody>
+                    <a:bodyPr/>
+                    <a:lstStyle/>
+                    <a:p>
+                      <a:pPr algn="ctr"/>
+                      <a:r>
+                        <a:rPr sz="1200">
+                          <a:solidFill>
+                            <a:srgbClr val="1F2A44"/>
+                          </a:solidFill>
+                        </a:rPr>
+                        <a:t>k=3 success</a:t>
+                      </a:r>
+                    </a:p>
+                  </a:txBody>
+                  <a:tcPr>
+                    <a:solidFill>
+                      <a:srgbClr val="F7F7F7"/>
+                    </a:solidFill>
+                  </a:tcPr>
+                </a:tc>
+                <a:tc>
+                  <a:txBody>
+                    <a:bodyPr/>
+                    <a:lstStyle/>
+                    <a:p>
+                      <a:pPr algn="ctr"/>
+                      <a:r>
+                        <a:rPr sz="1200" b="1">
+                          <a:solidFill>
+                            <a:srgbClr val="B02A2A"/>
+                          </a:solidFill>
+                        </a:rPr>
+                        <a:t>0.741</a:t>
+                      </a:r>
+                    </a:p>
+                  </a:txBody>
+                  <a:tcPr>
+                    <a:solidFill>
+                      <a:srgbClr val="F7F7F7"/>
+                    </a:solidFill>
+                  </a:tcPr>
+                </a:tc>
+                <a:tc>
+                  <a:txBody>
+                    <a:bodyPr/>
+                    <a:lstStyle/>
+                    <a:p>
+                      <a:pPr algn="ctr"/>
+                      <a:r>
+                        <a:rPr sz="1200">
+                          <a:solidFill>
+                            <a:srgbClr val="1F2A44"/>
+                          </a:solidFill>
+                        </a:rPr>
+                        <a:t>0.797</a:t>
+                      </a:r>
+                    </a:p>
+                  </a:txBody>
+                  <a:tcPr>
+                    <a:solidFill>
+                      <a:srgbClr val="F7F7F7"/>
+                    </a:solidFill>
+                  </a:tcPr>
+                </a:tc>
+                <a:tc>
+                  <a:txBody>
+                    <a:bodyPr/>
+                    <a:lstStyle/>
+                    <a:p>
+                      <a:pPr algn="ctr"/>
+                      <a:r>
+                        <a:rPr sz="1200" b="1">
+                          <a:solidFill>
+                            <a:srgbClr val="1E7A3C"/>
+                          </a:solidFill>
+                        </a:rPr>
+                        <a:t>0.862</a:t>
+                      </a:r>
+                    </a:p>
+                  </a:txBody>
+                  <a:tcPr>
+                    <a:solidFill>
+                      <a:srgbClr val="F7F7F7"/>
+                    </a:solidFill>
+                  </a:tcPr>
+                </a:tc>
+                <a:tc>
+                  <a:txBody>
+                    <a:bodyPr/>
+                    <a:lstStyle/>
+                    <a:p>
+                      <a:pPr algn="ctr"/>
+                      <a:r>
+                        <a:rPr sz="1200">
+                          <a:solidFill>
+                            <a:srgbClr val="1F2A44"/>
+                          </a:solidFill>
+                        </a:rPr>
+                        <a:t>0.812</a:t>
+                      </a:r>
+                    </a:p>
+                  </a:txBody>
+                  <a:tcPr>
+                    <a:solidFill>
+                      <a:srgbClr val="F7F7F7"/>
+                    </a:solidFill>
+                  </a:tcPr>
+                </a:tc>
+                <a:tc>
+                  <a:txBody>
+                    <a:bodyPr/>
+                    <a:lstStyle/>
+                    <a:p>
+                      <a:pPr algn="ctr"/>
+                      <a:r>
+                        <a:rPr sz="1200">
+                          <a:solidFill>
+                            <a:srgbClr val="1F2A44"/>
+                          </a:solidFill>
+                        </a:rPr>
+                        <a:t>0.848</a:t>
+                      </a:r>
+                    </a:p>
+                  </a:txBody>
+                  <a:tcPr>
+                    <a:solidFill>
+                      <a:srgbClr val="F7F7F7"/>
+                    </a:solidFill>
+                  </a:tcPr>
+                </a:tc>
+              </a:tr>
+            </a:tbl>
+          </a:graphicData>
+        </a:graphic>
+      </p:graphicFrame>
+      <p:sp>
+        <p:nvSpPr>
+          <p:cNvPr id="7" name="TextBox 6"/>
+          <p:cNvSpPr txBox="1"/>
+          <p:nvPr/>
+        </p:nvSpPr>
+        <p:spPr>
+          <a:xfrm>
+            <a:off x="6309360" y="3566160"/>
+            <a:ext cx="5486400" cy="5029200"/>
+          </a:xfrm>
+          <a:prstGeom prst="rect">
+            <a:avLst/>
+          </a:prstGeom>
+          <a:noFill/>
+        </p:spPr>
+        <p:txBody>
+          <a:bodyPr wrap="square">
+            <a:spAutoFit/>
+          </a:bodyPr>
+          <a:lstStyle/>
+          <a:p>
+            <a:pPr>
+              <a:spcAft>
+                <a:spcPts val="800"/>
+              </a:spcAft>
+            </a:pPr>
+            <a:r>
+              <a:rPr sz="1300" b="1">
+                <a:solidFill>
+                  <a:srgbClr val="1F2A44"/>
+                </a:solidFill>
+              </a:rPr>
+              <a:t>• Reading:</a:t>
+            </a:r>
+          </a:p>
+          <a:p>
+            <a:pPr lvl="1">
+              <a:spcAft>
+                <a:spcPts val="800"/>
+              </a:spcAft>
+            </a:pPr>
+            <a:r>
+              <a:rPr sz="1150" b="0">
+                <a:solidFill>
+                  <a:srgbClr val="555555"/>
+                </a:solidFill>
+              </a:rPr>
+              <a:t>– mae is worst on task success (Locks 1 &amp; 3) and worst on cost (Lock 2)</a:t>
+            </a:r>
+          </a:p>
+          <a:p>
+            <a:pPr lvl="1">
+              <a:spcAft>
+                <a:spcPts val="800"/>
+              </a:spcAft>
+            </a:pPr>
+            <a:r>
+              <a:rPr sz="1150" b="0">
+                <a:solidFill>
+                  <a:srgbClr val="555555"/>
+                </a:solidFill>
+              </a:rPr>
+              <a:t>– True at every shot count and every severity level tested</a:t>
+            </a:r>
+          </a:p>
+          <a:p>
+            <a:pPr lvl="1">
+              <a:spcAft>
+                <a:spcPts val="800"/>
+              </a:spcAft>
+            </a:pPr>
+            <a:r>
+              <a:rPr sz="1150" b="0">
+                <a:solidFill>
+                  <a:srgbClr val="555555"/>
+                </a:solidFill>
+              </a:rPr>
+              <a:t>– This ordering does not depend on which of the three robustness checks you look at — the whole point of building three independent checks was to make sure of exactly that</a:t>
+            </a:r>
+          </a:p>
+        </p:txBody>
+      </p:sp>
+      <p:sp>
+        <p:nvSpPr>
+          <p:cNvPr id="8" name="TextBox 7"/>
           <p:cNvSpPr txBox="1"/>
           <p:nvPr/>
         </p:nvSpPr>
@@ -5690,7 +6298,7 @@
                   <a:srgbClr val="555555"/>
                 </a:solidFill>
               </a:rPr>
-              <a:t>lower = better; supLP120 degrades fastest as the safety-critical penalty grows · trained_models/Phase3-controller/robust/costmodel_sweep.csv</a:t>
+              <a:t>trained_models/Phase3-controller/robust/{vocab_sweep,costmodel_summary,iso_safety_summary}.csv</a:t>
             </a:r>
           </a:p>
         </p:txBody>
@@ -5736,12 +6344,12 @@
           <a:lstStyle/>
           <a:p>
             <a:r>
-              <a:rPr sz="3000" b="1">
+              <a:rPr sz="2800" b="1">
                 <a:solidFill>
                   <a:srgbClr val="1F2A44"/>
                 </a:solidFill>
               </a:rPr>
-              <a:t>This Is Not a Bug</a:t>
+              <a:t>One Honest Secondary Finding (Not Hidden, Doesn’t Change the Ranking)</a:t>
             </a:r>
           </a:p>
         </p:txBody>
@@ -5755,7 +6363,7 @@
         <p:spPr>
           <a:xfrm>
             <a:off x="457200" y="1371600"/>
-            <a:ext cx="6949440" cy="5029200"/>
+            <a:ext cx="10332720" cy="5029200"/>
           </a:xfrm>
           <a:prstGeom prst="rect">
             <a:avLst/>
@@ -5774,12 +6382,27 @@
               </a:spcAft>
             </a:pPr>
             <a:r>
-              <a:rPr sz="1600" b="0">
+              <a:rPr sz="1700" b="0">
                 <a:solidFill>
                   <a:srgbClr val="1F2A44"/>
                 </a:solidFill>
               </a:rPr>
-              <a:t>• Traces to a mechanism the original design already anticipated and documented:</a:t>
+              <a:t>• supLP120 (the best-calibrated objective) still dips just below scratch on the ungated Lock 1 metric at k=1 (0.472 vs 0.516)</a:t>
+            </a:r>
+          </a:p>
+          <a:p>
+            <a:pPr lvl="1">
+              <a:spcAft>
+                <a:spcPts val="800"/>
+              </a:spcAft>
+            </a:pPr>
+            <a:r>
+              <a:rPr sz="1550" b="0">
+                <a:solidFill>
+                  <a:srgbClr val="555555"/>
+                </a:solidFill>
+              </a:rPr>
+              <a:t>– And trends as the second-most-expensive method as Lock 2’s penalty gets severe</a:t>
             </a:r>
           </a:p>
           <a:p>
@@ -5789,12 +6412,12 @@
               </a:spcAft>
             </a:pPr>
             <a:r>
-              <a:rPr sz="1600" b="1">
+              <a:rPr sz="1700" b="1">
                 <a:solidFill>
                   <a:srgbClr val="1F2A44"/>
                 </a:solidFill>
               </a:rPr>
-              <a:t>• supLP120 (best-calibrated objective on average) has a “confident false-critical-activation” mode</a:t>
+              <a:t>• Mechanism:</a:t>
             </a:r>
           </a:p>
           <a:p>
@@ -5804,12 +6427,27 @@
               </a:spcAft>
             </a:pPr>
             <a:r>
-              <a:rPr sz="1450" b="0">
+              <a:rPr sz="1550" b="0">
                 <a:solidFill>
                   <a:srgbClr val="555555"/>
                 </a:solidFill>
               </a:rPr>
-              <a:t>– It occasionally, confidently misclassifies an unrelated gesture onto one of the highly-separable safety-critical anchors</a:t>
+              <a:t>– supLP120’s confidence is well-calibrated and sharply separates classes</a:t>
+            </a:r>
+          </a:p>
+          <a:p>
+            <a:pPr lvl="1">
+              <a:spcAft>
+                <a:spcPts val="800"/>
+              </a:spcAft>
+            </a:pPr>
+            <a:r>
+              <a:rPr sz="1550" b="0">
+                <a:solidFill>
+                  <a:srgbClr val="555555"/>
+                </a:solidFill>
+              </a:rPr>
+              <a:t>– So it occasionally, confidently misclassifies an unrelated gesture onto a safety-critical anchor — confidently enough to clear even a moderate threshold</a:t>
             </a:r>
           </a:p>
           <a:p>
@@ -5819,12 +6457,12 @@
               </a:spcAft>
             </a:pPr>
             <a:r>
-              <a:rPr sz="1600" b="0">
+              <a:rPr sz="1700" b="1">
                 <a:solidFill>
                   <a:srgbClr val="1F2A44"/>
                 </a:solidFill>
               </a:rPr>
-              <a:t>• On the freshly-retrained checkpoint this specific failure mode is more pronounced</a:t>
+              <a:t>• Does NOT contradict the calibration story:</a:t>
             </a:r>
           </a:p>
           <a:p>
@@ -5834,27 +6472,12 @@
               </a:spcAft>
             </a:pPr>
             <a:r>
-              <a:rPr sz="1450" b="0">
+              <a:rPr sz="1550" b="0">
                 <a:solidFill>
                   <a:srgbClr val="555555"/>
                 </a:solidFill>
               </a:rPr>
-              <a:t>– It dominates once the safety-critical penalty is severe</a:t>
-            </a:r>
-          </a:p>
-          <a:p>
-            <a:pPr>
-              <a:spcAft>
-                <a:spcPts val="800"/>
-              </a:spcAft>
-            </a:pPr>
-            <a:r>
-              <a:rPr sz="1600" b="1">
-                <a:solidFill>
-                  <a:srgbClr val="1F2A44"/>
-                </a:solidFill>
-              </a:rPr>
-              <a:t>• Does NOT contradict the calibration story:</a:t>
+              <a:t>– supLP120 is still the best-calibrated method on average</a:t>
             </a:r>
           </a:p>
           <a:p>
@@ -5864,12 +6487,12 @@
               </a:spcAft>
             </a:pPr>
             <a:r>
-              <a:rPr sz="1450" b="0">
+              <a:rPr sz="1550" b="0">
                 <a:solidFill>
                   <a:srgbClr val="555555"/>
                 </a:solidFill>
               </a:rPr>
-              <a:t>– supLP120 is still the best-calibrated method on average (unchanged)</a:t>
+              <a:t>– It leads at k=3 under the iso-safety view (Lock 3)</a:t>
             </a:r>
           </a:p>
           <a:p>
@@ -5879,76 +6502,19 @@
               </a:spcAft>
             </a:pPr>
             <a:r>
-              <a:rPr sz="1450" b="0">
+              <a:rPr sz="1550" b="0">
                 <a:solidFill>
                   <a:srgbClr val="555555"/>
                 </a:solidFill>
               </a:rPr>
-              <a:t>– This is a second, narrower failure mode that a harsher stress test exposed</a:t>
-            </a:r>
-          </a:p>
-        </p:txBody>
-      </p:sp>
-      <p:sp>
-        <p:nvSpPr>
-          <p:cNvPr id="4" name="Rectangle 3"/>
-          <p:cNvSpPr/>
-          <p:nvPr/>
-        </p:nvSpPr>
-        <p:spPr>
-          <a:xfrm>
-            <a:off x="7589520" y="1463040"/>
-            <a:ext cx="4023360" cy="4389120"/>
-          </a:xfrm>
-          <a:prstGeom prst="rect">
-            <a:avLst/>
-          </a:prstGeom>
-          <a:solidFill>
-            <a:srgbClr val="EEEEEE"/>
-          </a:solidFill>
-          <a:ln w="15875">
-            <a:solidFill>
-              <a:srgbClr val="555555"/>
-            </a:solidFill>
-          </a:ln>
-        </p:spPr>
-        <p:style>
-          <a:lnRef idx="1">
-            <a:schemeClr val="accent1"/>
-          </a:lnRef>
-          <a:fillRef idx="3">
-            <a:schemeClr val="accent1"/>
-          </a:fillRef>
-          <a:effectRef idx="2">
-            <a:schemeClr val="accent1"/>
-          </a:effectRef>
-          <a:fontRef idx="minor">
-            <a:schemeClr val="lt1"/>
-          </a:fontRef>
-        </p:style>
-        <p:txBody>
-          <a:bodyPr rtlCol="0" anchor="ctr" wrap="square"/>
-          <a:lstStyle/>
-          <a:p>
-            <a:pPr algn="ctr"/>
-            <a:r>
-              <a:rPr sz="1200" i="1">
-                <a:solidFill>
-                  <a:srgbClr val="555555"/>
-                </a:solidFill>
-              </a:rPr>
-              <a:t>[FIGURE]
-Side-by-side bar chart:
-original run vs. rerun,
-same operating point,
-to make the flip visually obvious</a:t>
-            </a:r>
-          </a:p>
-        </p:txBody>
-      </p:sp>
-      <p:sp>
-        <p:nvSpPr>
-          <p:cNvPr id="5" name="TextBox 4"/>
+              <a:t>– A narrow, secondary effect, visible only at specific operating points — never rises to displace mae as worst under any of the three checks</a:t>
+            </a:r>
+          </a:p>
+        </p:txBody>
+      </p:sp>
+      <p:sp>
+        <p:nvSpPr>
+          <p:cNvPr id="4" name="TextBox 3"/>
           <p:cNvSpPr txBox="1"/>
           <p:nvPr/>
         </p:nvSpPr>
@@ -6020,12 +6586,12 @@
           <a:lstStyle/>
           <a:p>
             <a:r>
-              <a:rPr sz="3000" b="1">
-                <a:solidFill>
-                  <a:srgbClr val="B02A2A"/>
-                </a:solidFill>
-              </a:rPr>
-              <a:t>The Open Question (Discussion Point)</a:t>
+              <a:rPr sz="2800" b="1">
+                <a:solidFill>
+                  <a:srgbClr val="1F2A44"/>
+                </a:solidFill>
+              </a:rPr>
+              <a:t>What’s Not Yet Done</a:t>
             </a:r>
           </a:p>
         </p:txBody>
@@ -6038,40 +6604,7 @@
         </p:nvSpPr>
         <p:spPr>
           <a:xfrm>
-            <a:off x="457200" y="914400"/>
-            <a:ext cx="11247120" cy="365760"/>
-          </a:xfrm>
-          <a:prstGeom prst="rect">
-            <a:avLst/>
-          </a:prstGeom>
-          <a:noFill/>
-        </p:spPr>
-        <p:txBody>
-          <a:bodyPr wrap="square">
-            <a:spAutoFit/>
-          </a:bodyPr>
-          <a:lstStyle/>
-          <a:p>
-            <a:r>
-              <a:rPr sz="1400" i="1">
-                <a:solidFill>
-                  <a:srgbClr val="555555"/>
-                </a:solidFill>
-              </a:rPr>
-              <a:t>The three robustness checks — built specifically to make the “worst objective” claim bulletproof — currently disagree with each other</a:t>
-            </a:r>
-          </a:p>
-        </p:txBody>
-      </p:sp>
-      <p:sp>
-        <p:nvSpPr>
-          <p:cNvPr id="4" name="TextBox 3"/>
-          <p:cNvSpPr txBox="1"/>
-          <p:nvPr/>
-        </p:nvSpPr>
-        <p:spPr>
-          <a:xfrm>
-            <a:off x="457200" y="1508760"/>
+            <a:off x="457200" y="1371600"/>
             <a:ext cx="10332720" cy="5029200"/>
           </a:xfrm>
           <a:prstGeom prst="rect">
@@ -6091,12 +6624,27 @@
               </a:spcAft>
             </a:pPr>
             <a:r>
-              <a:rPr sz="1600" b="0">
+              <a:rPr sz="1800" b="1">
                 <a:solidFill>
                   <a:srgbClr val="1F2A44"/>
                 </a:solidFill>
               </a:rPr>
-              <a:t>• Randomized view → mae worst (on average, across many hypothetical task designs)</a:t>
+              <a:t>• Live human-in-the-loop study:</a:t>
+            </a:r>
+          </a:p>
+          <a:p>
+            <a:pPr lvl="1">
+              <a:spcAft>
+                <a:spcPts val="800"/>
+              </a:spcAft>
+            </a:pPr>
+            <a:r>
+              <a:rPr sz="1650" b="0">
+                <a:solidFill>
+                  <a:srgbClr val="555555"/>
+                </a:solidFill>
+              </a:rPr>
+              <a:t>– Exists only as an unapproved discussion draft (paper/live_study_protocol.md) — no IRB contact, no recruiting, no building</a:t>
             </a:r>
           </a:p>
           <a:p>
@@ -6106,12 +6654,27 @@
               </a:spcAft>
             </a:pPr>
             <a:r>
-              <a:rPr sz="1600" b="0">
+              <a:rPr sz="1800" b="1">
                 <a:solidFill>
                   <a:srgbClr val="1F2A44"/>
                 </a:solidFill>
               </a:rPr>
-              <a:t>• Fixed, reliability-ranked view → supLP120 worst (under the one specific, best-justified task design, worsening as errors get costlier)</a:t>
+              <a:t>• Real-time inference path:</a:t>
+            </a:r>
+          </a:p>
+          <a:p>
+            <a:pPr lvl="1">
+              <a:spcAft>
+                <a:spcPts val="800"/>
+              </a:spcAft>
+            </a:pPr>
+            <a:r>
+              <a:rPr sz="1650" b="0">
+                <a:solidFill>
+                  <a:srgbClr val="555555"/>
+                </a:solidFill>
+              </a:rPr>
+              <a:t>– Doesn’t exist yet; the controller currently replays already-collected held-out posteriors, not a live stream</a:t>
             </a:r>
           </a:p>
           <a:p>
@@ -6121,27 +6684,12 @@
               </a:spcAft>
             </a:pPr>
             <a:r>
-              <a:rPr sz="1600" b="1">
+              <a:rPr sz="1800" b="1">
                 <a:solidFill>
                   <a:srgbClr val="1F2A44"/>
                 </a:solidFill>
               </a:rPr>
-              <a:t>• Both are legitimate, both are explainable, and reporting only one would be selective.</a:t>
-            </a:r>
-          </a:p>
-          <a:p>
-            <a:pPr>
-              <a:spcAft>
-                <a:spcPts val="800"/>
-              </a:spcAft>
-            </a:pPr>
-            <a:r>
-              <a:rPr sz="1600" b="1">
-                <a:solidFill>
-                  <a:srgbClr val="1F2A44"/>
-                </a:solidFill>
-              </a:rPr>
-              <a:t>• Decisions needed:</a:t>
+              <a:t>• My own hands-on involvement:</a:t>
             </a:r>
           </a:p>
           <a:p>
@@ -6151,49 +6699,19 @@
               </a:spcAft>
             </a:pPr>
             <a:r>
-              <a:rPr sz="1450" b="0">
+              <a:rPr sz="1650" b="0">
                 <a:solidFill>
                   <a:srgbClr val="555555"/>
                 </a:solidFill>
               </a:rPr>
-              <a:t>– 1. Report both explicitly as two different (and both true) claims, rather than picking one “worst” objective?</a:t>
-            </a:r>
-          </a:p>
-          <a:p>
-            <a:pPr lvl="1">
-              <a:spcAft>
-                <a:spcPts val="800"/>
-              </a:spcAft>
-            </a:pPr>
-            <a:r>
-              <a:rPr sz="1450" b="0">
-                <a:solidFill>
-                  <a:srgbClr val="555555"/>
-                </a:solidFill>
-              </a:rPr>
-              <a:t>– 2. Treat the randomized view (Lock 1) as primary — it’s already called “the primary evaluation protocol” — and demote the fixed-view number out of the abstract?</a:t>
-            </a:r>
-          </a:p>
-          <a:p>
-            <a:pPr lvl="1">
-              <a:spcAft>
-                <a:spcPts val="800"/>
-              </a:spcAft>
-            </a:pPr>
-            <a:r>
-              <a:rPr sz="1450" b="0">
-                <a:solidFill>
-                  <a:srgbClr val="555555"/>
-                </a:solidFill>
-              </a:rPr>
-              <a:t>– 3. Is there a principled reason to trust one view for a deployed system, which would use one fixed assignment, not 120 random ones?</a:t>
-            </a:r>
-          </a:p>
-        </p:txBody>
-      </p:sp>
-      <p:sp>
-        <p:nvSpPr>
-          <p:cNvPr id="5" name="TextBox 4"/>
+              <a:t>– I have supervised this component’s design and direction but have not yet implemented or debugged it myself — flagging that directly</a:t>
+            </a:r>
+          </a:p>
+        </p:txBody>
+      </p:sp>
+      <p:sp>
+        <p:nvSpPr>
+          <p:cNvPr id="4" name="TextBox 3"/>
           <p:cNvSpPr txBox="1"/>
           <p:nvPr/>
         </p:nvSpPr>
@@ -6219,7 +6737,7 @@
                   <a:srgbClr val="555555"/>
                 </a:solidFill>
               </a:rPr>
-              <a:t>Not yet done: live human-in-the-loop study exists only as an unapproved draft (paper/live_study_protocol.md) — no IRB, no recruiting, no building</a:t>
+              <a:t/>
             </a:r>
           </a:p>
         </p:txBody>
@@ -6323,7 +6841,22 @@
                   <a:srgbClr val="1F2A44"/>
                 </a:solidFill>
               </a:rPr>
-              <a:t>• Locked numbers (both runs): wiki/results/phase3-controller.md, trained_models/Phase3-controller/</a:t>
+              <a:t>• Locked numbers: wiki/results/phase3-controller.md, trained_models/Phase3-controller/robust/</a:t>
+            </a:r>
+          </a:p>
+          <a:p>
+            <a:pPr lvl="1">
+              <a:spcAft>
+                <a:spcPts val="800"/>
+              </a:spcAft>
+            </a:pPr>
+            <a:r>
+              <a:rPr sz="1550" b="0">
+                <a:solidFill>
+                  <a:srgbClr val="555555"/>
+                </a:solidFill>
+              </a:rPr>
+              <a:t>– vocab_sweep.csv = Lock 1, costmodel_sweep/summary.csv = Lock 2, frontier/iso_safety(_summary).csv = Lock 3</a:t>
             </a:r>
           </a:p>
           <a:p>
@@ -6338,7 +6871,7 @@
                   <a:srgbClr val="1F2A44"/>
                 </a:solidFill>
               </a:rPr>
-              <a:t>• Paper section: paper/paper_results.md, R5 (has the 2026-07-20 update note inline)</a:t>
+              <a:t>• Paper section: paper/paper_results.md R5, paper/paper_method.md §8/§8.1</a:t>
             </a:r>
           </a:p>
           <a:p>
@@ -6353,22 +6886,7 @@
                   <a:srgbClr val="1F2A44"/>
                 </a:solidFill>
               </a:rPr>
-              <a:t>• Scripts: scripts/controller/controller_sim.py (single-config prototype)</a:t>
-            </a:r>
-          </a:p>
-          <a:p>
-            <a:pPr lvl="1">
-              <a:spcAft>
-                <a:spcPts val="800"/>
-              </a:spcAft>
-            </a:pPr>
-            <a:r>
-              <a:rPr sz="1550" b="0">
-                <a:solidFill>
-                  <a:srgbClr val="555555"/>
-                </a:solidFill>
-              </a:rPr>
-              <a:t>– scripts/controller/controller_robust.py (three-lock robustness protocol)</a:t>
+              <a:t>• Script: scripts/controller/controller_robust.py --vocabs 120 --missions 1000</a:t>
             </a:r>
           </a:p>
         </p:txBody>
